--- a/Slides/deck/proposal-260826.pptx
+++ b/Slides/deck/proposal-260826.pptx
@@ -781,7 +781,7 @@
           <a:p>
             <a:r>
               <a:rPr lang="en-US" dirty="0"/>
-              <a:t>트리거: 「어떻게 검정합니까」. Model 번호는 조절 위치 확정 후에 넣는다.</a:t>
+              <a:t>트리거: 「어떻게 검정합니까」 「Model 7이면 조건부 간접효과를 보고합니까」. 답: 상호작용항으로 H4를 판정하고 조건부 간접효과를 함께 보고한다. MOD 직접항은 통제로 투입하되 가설로 세우지 않는다.</a:t>
             </a:r>
             <a:endParaRPr lang="en-US" dirty="0"/>
           </a:p>
@@ -1573,7 +1573,7 @@
           <a:p>
             <a:r>
               <a:rPr lang="en-US" dirty="0"/>
-              <a:t>35초. 세 개를 한 문장씩. 붉은 화살표 줄만 말해도 된다.</a:t>
+              <a:t>35초. 왼쪽에서 오른쪽으로 한 줄씩 읽으면 그대로 발화가 된다 — 「지금까지는 …를 물었고, 본 연구는 …를 묻습니다. 그래서 …」. 세 번 반복하고 넘어간다. 붉은 화살표 줄만 말해도 성립한다.</a:t>
             </a:r>
             <a:endParaRPr lang="en-US" dirty="0"/>
           </a:p>
@@ -1661,7 +1661,7 @@
           <a:p>
             <a:r>
               <a:rPr lang="en-US" dirty="0"/>
-              <a:t>85초. 가장 긴 장. 척추 한 줄을 먼저 말하고 도식을 짚는다. 이론은 두 개로만. H4는 「조절 위치는 사전 검정력 분석으로 확정하겠습니다」까지만.</a:t>
+              <a:t>85초. 척추 한 줄을 먼저 말하고 도식을 짚는다. 이론은 두 개로만. H4는 위치를 확정해서 말한다 — 완화 논리가 MV를 낮추는 진술이므로 a경로 조절로 정합하다. 다만 조작화 방식(측정/조작)은 사전 검정력으로 정한다고 한 문장 덧붙인다. 위치까지 미정이라고 말하지 않는다.</a:t>
             </a:r>
             <a:endParaRPr lang="en-US" dirty="0"/>
           </a:p>
@@ -3054,7 +3054,7 @@
           </p:nvPr>
         </p:nvGraphicFramePr>
         <p:xfrm>
-          <a:off x="640080" y="2249424"/>
+          <a:off x="640080" y="2212848"/>
           <a:ext cx="10927080" cy="914400"/>
         </p:xfrm>
         <a:graphic>
@@ -3066,7 +3066,7 @@
                 <a:gridCol w="5870448"/>
                 <a:gridCol w="2404872"/>
               </a:tblGrid>
-              <a:tr h="603504">
+              <a:tr h="548640">
                 <a:tc>
                   <a:txBody>
                     <a:bodyPr/>
@@ -3076,7 +3076,7 @@
                         <a:buNone/>
                       </a:pPr>
                       <a:r>
-                        <a:rPr lang="en-US" sz="1150" b="1" dirty="0">
+                        <a:rPr lang="en-US" sz="1100" b="1" dirty="0">
                           <a:solidFill>
                             <a:srgbClr val="1F2226"/>
                           </a:solidFill>
@@ -3086,14 +3086,14 @@
                         </a:rPr>
                         <a:t>이론</a:t>
                       </a:r>
-                      <a:endParaRPr lang="en-US" sz="1150" dirty="0">
+                      <a:endParaRPr lang="en-US" sz="1100" dirty="0">
                         <a:latin typeface="Arial" charset="0"/>
                         <a:ea typeface="Arial" charset="0"/>
                         <a:cs typeface="Arial" charset="0"/>
                       </a:endParaRPr>
                     </a:p>
                   </a:txBody>
-                  <a:tcPr marL="101600" marR="101600" marT="63500" marB="63500" anchor="ctr">
+                  <a:tcPr marL="101600" marR="101600" marT="50800" marB="50800" anchor="ctr">
                     <a:lnL w="9525" cap="flat" cmpd="sng" algn="ctr">
                       <a:solidFill>
                         <a:srgbClr val="C9CDD3"/>
@@ -3144,7 +3144,7 @@
                         <a:buNone/>
                       </a:pPr>
                       <a:r>
-                        <a:rPr lang="en-US" sz="1150" b="1" dirty="0">
+                        <a:rPr lang="en-US" sz="1100" b="1" dirty="0">
                           <a:solidFill>
                             <a:srgbClr val="1F2226"/>
                           </a:solidFill>
@@ -3154,14 +3154,14 @@
                         </a:rPr>
                         <a:t>내용</a:t>
                       </a:r>
-                      <a:endParaRPr lang="en-US" sz="1150" dirty="0">
+                      <a:endParaRPr lang="en-US" sz="1100" dirty="0">
                         <a:latin typeface="Arial" charset="0"/>
                         <a:ea typeface="Arial" charset="0"/>
                         <a:cs typeface="Arial" charset="0"/>
                       </a:endParaRPr>
                     </a:p>
                   </a:txBody>
-                  <a:tcPr marL="101600" marR="101600" marT="63500" marB="63500" anchor="ctr">
+                  <a:tcPr marL="101600" marR="101600" marT="50800" marB="50800" anchor="ctr">
                     <a:lnL w="9525" cap="flat" cmpd="sng" algn="ctr">
                       <a:solidFill>
                         <a:srgbClr val="C9CDD3"/>
@@ -3212,7 +3212,7 @@
                         <a:buNone/>
                       </a:pPr>
                       <a:r>
-                        <a:rPr lang="en-US" sz="1150" b="1" dirty="0">
+                        <a:rPr lang="en-US" sz="1100" b="1" dirty="0">
                           <a:solidFill>
                             <a:srgbClr val="1F2226"/>
                           </a:solidFill>
@@ -3222,14 +3222,14 @@
                         </a:rPr>
                         <a:t>담당 경로</a:t>
                       </a:r>
-                      <a:endParaRPr lang="en-US" sz="1150" dirty="0">
+                      <a:endParaRPr lang="en-US" sz="1100" dirty="0">
                         <a:latin typeface="Arial" charset="0"/>
                         <a:ea typeface="Arial" charset="0"/>
                         <a:cs typeface="Arial" charset="0"/>
                       </a:endParaRPr>
                     </a:p>
                   </a:txBody>
-                  <a:tcPr marL="101600" marR="101600" marT="63500" marB="63500" anchor="ctr">
+                  <a:tcPr marL="101600" marR="101600" marT="50800" marB="50800" anchor="ctr">
                     <a:lnL w="9525" cap="flat" cmpd="sng" algn="ctr">
                       <a:solidFill>
                         <a:srgbClr val="C9CDD3"/>
@@ -3272,7 +3272,7 @@
                   </a:tcPr>
                 </a:tc>
               </a:tr>
-              <a:tr h="603504">
+              <a:tr h="548640">
                 <a:tc>
                   <a:txBody>
                     <a:bodyPr/>
@@ -3282,7 +3282,7 @@
                         <a:buNone/>
                       </a:pPr>
                       <a:r>
-                        <a:rPr lang="en-US" sz="1150" dirty="0">
+                        <a:rPr lang="en-US" sz="1100" dirty="0">
                           <a:solidFill>
                             <a:srgbClr val="1F2226"/>
                           </a:solidFill>
@@ -3292,7 +3292,7 @@
                         </a:rPr>
                         <a:t>귀인이론 · 기대원리</a:t>
                       </a:r>
-                      <a:endParaRPr lang="en-US" sz="1150" dirty="0">
+                      <a:endParaRPr lang="en-US" sz="1100" dirty="0">
                         <a:latin typeface="Arial" charset="0"/>
                         <a:ea typeface="Arial" charset="0"/>
                         <a:cs typeface="Arial" charset="0"/>
@@ -3303,7 +3303,7 @@
                         <a:buNone/>
                       </a:pPr>
                       <a:r>
-                        <a:rPr lang="en-US" sz="1150" dirty="0">
+                        <a:rPr lang="en-US" sz="1100" dirty="0">
                           <a:solidFill>
                             <a:srgbClr val="1F2226"/>
                           </a:solidFill>
@@ -3313,14 +3313,14 @@
                         </a:rPr>
                         <a:t>(Weiner, 1985)</a:t>
                       </a:r>
-                      <a:endParaRPr lang="en-US" sz="1150" dirty="0">
+                      <a:endParaRPr lang="en-US" sz="1100" dirty="0">
                         <a:latin typeface="Arial" charset="0"/>
                         <a:ea typeface="Arial" charset="0"/>
                         <a:cs typeface="Arial" charset="0"/>
                       </a:endParaRPr>
                     </a:p>
                   </a:txBody>
-                  <a:tcPr marL="101600" marR="101600" marT="63500" marB="63500" anchor="ctr">
+                  <a:tcPr marL="101600" marR="101600" marT="50800" marB="50800" anchor="ctr">
                     <a:lnL w="9525" cap="flat" cmpd="sng" algn="ctr">
                       <a:solidFill>
                         <a:srgbClr val="C9CDD3"/>
@@ -3371,7 +3371,7 @@
                         <a:buNone/>
                       </a:pPr>
                       <a:r>
-                        <a:rPr lang="en-US" sz="1150" dirty="0">
+                        <a:rPr lang="en-US" sz="1100" dirty="0">
                           <a:solidFill>
                             <a:srgbClr val="1F2226"/>
                           </a:solidFill>
@@ -3381,7 +3381,7 @@
                         </a:rPr>
                         <a:t>원인을 안정적으로 귀속할 수 있을 때 미래 결과를 예측할 수 있다</a:t>
                       </a:r>
-                      <a:endParaRPr lang="en-US" sz="1150" dirty="0">
+                      <a:endParaRPr lang="en-US" sz="1100" dirty="0">
                         <a:latin typeface="Arial" charset="0"/>
                         <a:ea typeface="Arial" charset="0"/>
                         <a:cs typeface="Arial" charset="0"/>
@@ -3392,7 +3392,7 @@
                         <a:buNone/>
                       </a:pPr>
                       <a:r>
-                        <a:rPr lang="en-US" sz="1150" dirty="0">
+                        <a:rPr lang="en-US" sz="1100" dirty="0">
                           <a:solidFill>
                             <a:srgbClr val="1F2226"/>
                           </a:solidFill>
@@ -3402,14 +3402,14 @@
                         </a:rPr>
                         <a:t>귀속할 수 없으면 예측할 수 없다</a:t>
                       </a:r>
-                      <a:endParaRPr lang="en-US" sz="1150" dirty="0">
+                      <a:endParaRPr lang="en-US" sz="1100" dirty="0">
                         <a:latin typeface="Arial" charset="0"/>
                         <a:ea typeface="Arial" charset="0"/>
                         <a:cs typeface="Arial" charset="0"/>
                       </a:endParaRPr>
                     </a:p>
                   </a:txBody>
-                  <a:tcPr marL="101600" marR="101600" marT="63500" marB="63500" anchor="ctr">
+                  <a:tcPr marL="101600" marR="101600" marT="50800" marB="50800" anchor="ctr">
                     <a:lnL w="9525" cap="flat" cmpd="sng" algn="ctr">
                       <a:solidFill>
                         <a:srgbClr val="C9CDD3"/>
@@ -3460,7 +3460,7 @@
                         <a:buNone/>
                       </a:pPr>
                       <a:r>
-                        <a:rPr lang="en-US" sz="1150" dirty="0">
+                        <a:rPr lang="en-US" sz="1100" dirty="0">
                           <a:solidFill>
                             <a:srgbClr val="1F2226"/>
                           </a:solidFill>
@@ -3470,14 +3470,14 @@
                         </a:rPr>
                         <a:t>IV → MV   (H1)</a:t>
                       </a:r>
-                      <a:endParaRPr lang="en-US" sz="1150" dirty="0">
+                      <a:endParaRPr lang="en-US" sz="1100" dirty="0">
                         <a:latin typeface="Arial" charset="0"/>
                         <a:ea typeface="Arial" charset="0"/>
                         <a:cs typeface="Arial" charset="0"/>
                       </a:endParaRPr>
                     </a:p>
                   </a:txBody>
-                  <a:tcPr marL="101600" marR="101600" marT="63500" marB="63500" anchor="ctr">
+                  <a:tcPr marL="101600" marR="101600" marT="50800" marB="50800" anchor="ctr">
                     <a:lnL w="9525" cap="flat" cmpd="sng" algn="ctr">
                       <a:solidFill>
                         <a:srgbClr val="C9CDD3"/>
@@ -3520,7 +3520,7 @@
                   </a:tcPr>
                 </a:tc>
               </a:tr>
-              <a:tr h="603504">
+              <a:tr h="548640">
                 <a:tc>
                   <a:txBody>
                     <a:bodyPr/>
@@ -3530,7 +3530,7 @@
                         <a:buNone/>
                       </a:pPr>
                       <a:r>
-                        <a:rPr lang="en-US" sz="1150" dirty="0">
+                        <a:rPr lang="en-US" sz="1100" dirty="0">
                           <a:solidFill>
                             <a:srgbClr val="1F2226"/>
                           </a:solidFill>
@@ -3540,7 +3540,7 @@
                         </a:rPr>
                         <a:t>절차 규칙</a:t>
                       </a:r>
-                      <a:endParaRPr lang="en-US" sz="1150" dirty="0">
+                      <a:endParaRPr lang="en-US" sz="1100" dirty="0">
                         <a:latin typeface="Arial" charset="0"/>
                         <a:ea typeface="Arial" charset="0"/>
                         <a:cs typeface="Arial" charset="0"/>
@@ -3551,7 +3551,7 @@
                         <a:buNone/>
                       </a:pPr>
                       <a:r>
-                        <a:rPr lang="en-US" sz="1150" dirty="0">
+                        <a:rPr lang="en-US" sz="1100" dirty="0">
                           <a:solidFill>
                             <a:srgbClr val="1F2226"/>
                           </a:solidFill>
@@ -3561,14 +3561,14 @@
                         </a:rPr>
                         <a:t>(Leventhal, 1980)</a:t>
                       </a:r>
-                      <a:endParaRPr lang="en-US" sz="1150" dirty="0">
+                      <a:endParaRPr lang="en-US" sz="1100" dirty="0">
                         <a:latin typeface="Arial" charset="0"/>
                         <a:ea typeface="Arial" charset="0"/>
                         <a:cs typeface="Arial" charset="0"/>
                       </a:endParaRPr>
                     </a:p>
                   </a:txBody>
-                  <a:tcPr marL="101600" marR="101600" marT="63500" marB="63500" anchor="ctr">
+                  <a:tcPr marL="101600" marR="101600" marT="50800" marB="50800" anchor="ctr">
                     <a:lnL w="9525" cap="flat" cmpd="sng" algn="ctr">
                       <a:solidFill>
                         <a:srgbClr val="C9CDD3"/>
@@ -3619,7 +3619,7 @@
                         <a:buNone/>
                       </a:pPr>
                       <a:r>
-                        <a:rPr lang="en-US" sz="1150" dirty="0">
+                        <a:rPr lang="en-US" sz="1100" dirty="0">
                           <a:solidFill>
                             <a:srgbClr val="1F2226"/>
                           </a:solidFill>
@@ -3629,7 +3629,7 @@
                         </a:rPr>
                         <a:t>절차공정성은 일관성·정확성 규칙의 충족으로 판단된다</a:t>
                       </a:r>
-                      <a:endParaRPr lang="en-US" sz="1150" dirty="0">
+                      <a:endParaRPr lang="en-US" sz="1100" dirty="0">
                         <a:latin typeface="Arial" charset="0"/>
                         <a:ea typeface="Arial" charset="0"/>
                         <a:cs typeface="Arial" charset="0"/>
@@ -3640,7 +3640,7 @@
                         <a:buNone/>
                       </a:pPr>
                       <a:r>
-                        <a:rPr lang="en-US" sz="1150" dirty="0">
+                        <a:rPr lang="en-US" sz="1100" dirty="0">
                           <a:solidFill>
                             <a:srgbClr val="1F2226"/>
                           </a:solidFill>
@@ -3650,14 +3650,14 @@
                         </a:rPr>
                         <a:t>예측할 수 없는 평가는 그 규칙이 지켜졌다고 판단할 근거를 잃는다</a:t>
                       </a:r>
-                      <a:endParaRPr lang="en-US" sz="1150" dirty="0">
+                      <a:endParaRPr lang="en-US" sz="1100" dirty="0">
                         <a:latin typeface="Arial" charset="0"/>
                         <a:ea typeface="Arial" charset="0"/>
                         <a:cs typeface="Arial" charset="0"/>
                       </a:endParaRPr>
                     </a:p>
                   </a:txBody>
-                  <a:tcPr marL="101600" marR="101600" marT="63500" marB="63500" anchor="ctr">
+                  <a:tcPr marL="101600" marR="101600" marT="50800" marB="50800" anchor="ctr">
                     <a:lnL w="9525" cap="flat" cmpd="sng" algn="ctr">
                       <a:solidFill>
                         <a:srgbClr val="C9CDD3"/>
@@ -3708,7 +3708,7 @@
                         <a:buNone/>
                       </a:pPr>
                       <a:r>
-                        <a:rPr lang="en-US" sz="1150" dirty="0">
+                        <a:rPr lang="en-US" sz="1100" dirty="0">
                           <a:solidFill>
                             <a:srgbClr val="1F2226"/>
                           </a:solidFill>
@@ -3718,14 +3718,14 @@
                         </a:rPr>
                         <a:t>MV → DV   (H2)</a:t>
                       </a:r>
-                      <a:endParaRPr lang="en-US" sz="1150" dirty="0">
+                      <a:endParaRPr lang="en-US" sz="1100" dirty="0">
                         <a:latin typeface="Arial" charset="0"/>
                         <a:ea typeface="Arial" charset="0"/>
                         <a:cs typeface="Arial" charset="0"/>
                       </a:endParaRPr>
                     </a:p>
                   </a:txBody>
-                  <a:tcPr marL="101600" marR="101600" marT="63500" marB="63500" anchor="ctr">
+                  <a:tcPr marL="101600" marR="101600" marT="50800" marB="50800" anchor="ctr">
                     <a:lnL w="9525" cap="flat" cmpd="sng" algn="ctr">
                       <a:solidFill>
                         <a:srgbClr val="C9CDD3"/>
@@ -3768,7 +3768,7 @@
                   </a:tcPr>
                 </a:tc>
               </a:tr>
-              <a:tr h="603504">
+              <a:tr h="548640">
                 <a:tc>
                   <a:txBody>
                     <a:bodyPr/>
@@ -3778,7 +3778,7 @@
                         <a:buNone/>
                       </a:pPr>
                       <a:r>
-                        <a:rPr lang="en-US" sz="1150" dirty="0">
+                        <a:rPr lang="en-US" sz="1100" dirty="0">
                           <a:solidFill>
                             <a:srgbClr val="1F2226"/>
                           </a:solidFill>
@@ -3788,7 +3788,7 @@
                         </a:rPr>
                         <a:t>조직 공정성</a:t>
                       </a:r>
-                      <a:endParaRPr lang="en-US" sz="1150" dirty="0">
+                      <a:endParaRPr lang="en-US" sz="1100" dirty="0">
                         <a:latin typeface="Arial" charset="0"/>
                         <a:ea typeface="Arial" charset="0"/>
                         <a:cs typeface="Arial" charset="0"/>
@@ -3799,7 +3799,7 @@
                         <a:buNone/>
                       </a:pPr>
                       <a:r>
-                        <a:rPr lang="en-US" sz="1150" dirty="0">
+                        <a:rPr lang="en-US" sz="1100" dirty="0">
                           <a:solidFill>
                             <a:srgbClr val="1F2226"/>
                           </a:solidFill>
@@ -3809,14 +3809,14 @@
                         </a:rPr>
                         <a:t>(Colquitt, 2001)</a:t>
                       </a:r>
-                      <a:endParaRPr lang="en-US" sz="1150" dirty="0">
+                      <a:endParaRPr lang="en-US" sz="1100" dirty="0">
                         <a:latin typeface="Arial" charset="0"/>
                         <a:ea typeface="Arial" charset="0"/>
                         <a:cs typeface="Arial" charset="0"/>
                       </a:endParaRPr>
                     </a:p>
                   </a:txBody>
-                  <a:tcPr marL="101600" marR="101600" marT="63500" marB="63500" anchor="ctr">
+                  <a:tcPr marL="101600" marR="101600" marT="50800" marB="50800" anchor="ctr">
                     <a:lnL w="9525" cap="flat" cmpd="sng" algn="ctr">
                       <a:solidFill>
                         <a:srgbClr val="C9CDD3"/>
@@ -3867,7 +3867,7 @@
                         <a:buNone/>
                       </a:pPr>
                       <a:r>
-                        <a:rPr lang="en-US" sz="1150" dirty="0">
+                        <a:rPr lang="en-US" sz="1100" dirty="0">
                           <a:solidFill>
                             <a:srgbClr val="1F2226"/>
                           </a:solidFill>
@@ -3877,14 +3877,14 @@
                         </a:rPr>
                         <a:t>절차공정성 구성개념의 정의와 측정 토대</a:t>
                       </a:r>
-                      <a:endParaRPr lang="en-US" sz="1150" dirty="0">
+                      <a:endParaRPr lang="en-US" sz="1100" dirty="0">
                         <a:latin typeface="Arial" charset="0"/>
                         <a:ea typeface="Arial" charset="0"/>
                         <a:cs typeface="Arial" charset="0"/>
                       </a:endParaRPr>
                     </a:p>
                   </a:txBody>
-                  <a:tcPr marL="101600" marR="101600" marT="63500" marB="63500" anchor="ctr">
+                  <a:tcPr marL="101600" marR="101600" marT="50800" marB="50800" anchor="ctr">
                     <a:lnL w="9525" cap="flat" cmpd="sng" algn="ctr">
                       <a:solidFill>
                         <a:srgbClr val="C9CDD3"/>
@@ -3935,7 +3935,7 @@
                         <a:buNone/>
                       </a:pPr>
                       <a:r>
-                        <a:rPr lang="en-US" sz="1150" dirty="0">
+                        <a:rPr lang="en-US" sz="1100" dirty="0">
                           <a:solidFill>
                             <a:srgbClr val="1F2226"/>
                           </a:solidFill>
@@ -3945,14 +3945,14 @@
                         </a:rPr>
                         <a:t>DV 정의 · 측정</a:t>
                       </a:r>
-                      <a:endParaRPr lang="en-US" sz="1150" dirty="0">
+                      <a:endParaRPr lang="en-US" sz="1100" dirty="0">
                         <a:latin typeface="Arial" charset="0"/>
                         <a:ea typeface="Arial" charset="0"/>
                         <a:cs typeface="Arial" charset="0"/>
                       </a:endParaRPr>
                     </a:p>
                   </a:txBody>
-                  <a:tcPr marL="101600" marR="101600" marT="63500" marB="63500" anchor="ctr">
+                  <a:tcPr marL="101600" marR="101600" marT="50800" marB="50800" anchor="ctr">
                     <a:lnL w="9525" cap="flat" cmpd="sng" algn="ctr">
                       <a:solidFill>
                         <a:srgbClr val="C9CDD3"/>
@@ -3995,7 +3995,7 @@
                   </a:tcPr>
                 </a:tc>
               </a:tr>
-              <a:tr h="603504">
+              <a:tr h="548640">
                 <a:tc>
                   <a:txBody>
                     <a:bodyPr/>
@@ -4005,7 +4005,7 @@
                         <a:buNone/>
                       </a:pPr>
                       <a:r>
-                        <a:rPr lang="en-US" sz="1150" dirty="0">
+                        <a:rPr lang="en-US" sz="1100" dirty="0">
                           <a:solidFill>
                             <a:srgbClr val="1F2226"/>
                           </a:solidFill>
@@ -4015,7 +4015,7 @@
                         </a:rPr>
                         <a:t>역할 모호성</a:t>
                       </a:r>
-                      <a:endParaRPr lang="en-US" sz="1150" dirty="0">
+                      <a:endParaRPr lang="en-US" sz="1100" dirty="0">
                         <a:latin typeface="Arial" charset="0"/>
                         <a:ea typeface="Arial" charset="0"/>
                         <a:cs typeface="Arial" charset="0"/>
@@ -4026,7 +4026,7 @@
                         <a:buNone/>
                       </a:pPr>
                       <a:r>
-                        <a:rPr lang="en-US" sz="1150" dirty="0">
+                        <a:rPr lang="en-US" sz="1100" dirty="0">
                           <a:solidFill>
                             <a:srgbClr val="1F2226"/>
                           </a:solidFill>
@@ -4036,14 +4036,14 @@
                         </a:rPr>
                         <a:t>(Rizzo et al., 1970)</a:t>
                       </a:r>
-                      <a:endParaRPr lang="en-US" sz="1150" dirty="0">
+                      <a:endParaRPr lang="en-US" sz="1100" dirty="0">
                         <a:latin typeface="Arial" charset="0"/>
                         <a:ea typeface="Arial" charset="0"/>
                         <a:cs typeface="Arial" charset="0"/>
                       </a:endParaRPr>
                     </a:p>
                   </a:txBody>
-                  <a:tcPr marL="101600" marR="101600" marT="63500" marB="63500" anchor="ctr">
+                  <a:tcPr marL="101600" marR="101600" marT="50800" marB="50800" anchor="ctr">
                     <a:lnL w="9525" cap="flat" cmpd="sng" algn="ctr">
                       <a:solidFill>
                         <a:srgbClr val="C9CDD3"/>
@@ -4094,7 +4094,7 @@
                         <a:buNone/>
                       </a:pPr>
                       <a:r>
-                        <a:rPr lang="en-US" sz="1150" dirty="0">
+                        <a:rPr lang="en-US" sz="1100" dirty="0">
                           <a:solidFill>
                             <a:srgbClr val="1F2226"/>
                           </a:solidFill>
@@ -4104,14 +4104,14 @@
                         </a:rPr>
                         <a:t>자기 행동 결과의 예측가능성 — MV 측정의 뿌리</a:t>
                       </a:r>
-                      <a:endParaRPr lang="en-US" sz="1150" dirty="0">
+                      <a:endParaRPr lang="en-US" sz="1100" dirty="0">
                         <a:latin typeface="Arial" charset="0"/>
                         <a:ea typeface="Arial" charset="0"/>
                         <a:cs typeface="Arial" charset="0"/>
                       </a:endParaRPr>
                     </a:p>
                   </a:txBody>
-                  <a:tcPr marL="101600" marR="101600" marT="63500" marB="63500" anchor="ctr">
+                  <a:tcPr marL="101600" marR="101600" marT="50800" marB="50800" anchor="ctr">
                     <a:lnL w="9525" cap="flat" cmpd="sng" algn="ctr">
                       <a:solidFill>
                         <a:srgbClr val="C9CDD3"/>
@@ -4162,7 +4162,7 @@
                         <a:buNone/>
                       </a:pPr>
                       <a:r>
-                        <a:rPr lang="en-US" sz="1150" dirty="0">
+                        <a:rPr lang="en-US" sz="1100" dirty="0">
                           <a:solidFill>
                             <a:srgbClr val="1F2226"/>
                           </a:solidFill>
@@ -4172,14 +4172,510 @@
                         </a:rPr>
                         <a:t>MV 측정</a:t>
                       </a:r>
-                      <a:endParaRPr lang="en-US" sz="1150" dirty="0">
+                      <a:endParaRPr lang="en-US" sz="1100" dirty="0">
                         <a:latin typeface="Arial" charset="0"/>
                         <a:ea typeface="Arial" charset="0"/>
                         <a:cs typeface="Arial" charset="0"/>
                       </a:endParaRPr>
                     </a:p>
                   </a:txBody>
-                  <a:tcPr marL="101600" marR="101600" marT="63500" marB="63500" anchor="ctr">
+                  <a:tcPr marL="101600" marR="101600" marT="50800" marB="50800" anchor="ctr">
+                    <a:lnL w="9525" cap="flat" cmpd="sng" algn="ctr">
+                      <a:solidFill>
+                        <a:srgbClr val="C9CDD3"/>
+                      </a:solidFill>
+                      <a:prstDash val="solid"/>
+                      <a:round/>
+                      <a:headEnd type="none" w="med" len="med"/>
+                      <a:tailEnd type="none" w="med" len="med"/>
+                    </a:lnL>
+                    <a:lnR w="9525" cap="flat" cmpd="sng" algn="ctr">
+                      <a:solidFill>
+                        <a:srgbClr val="C9CDD3"/>
+                      </a:solidFill>
+                      <a:prstDash val="solid"/>
+                      <a:round/>
+                      <a:headEnd type="none" w="med" len="med"/>
+                      <a:tailEnd type="none" w="med" len="med"/>
+                    </a:lnR>
+                    <a:lnT w="9525" cap="flat" cmpd="sng" algn="ctr">
+                      <a:solidFill>
+                        <a:srgbClr val="C9CDD3"/>
+                      </a:solidFill>
+                      <a:prstDash val="solid"/>
+                      <a:round/>
+                      <a:headEnd type="none" w="med" len="med"/>
+                      <a:tailEnd type="none" w="med" len="med"/>
+                    </a:lnT>
+                    <a:lnB w="9525" cap="flat" cmpd="sng" algn="ctr">
+                      <a:solidFill>
+                        <a:srgbClr val="C9CDD3"/>
+                      </a:solidFill>
+                      <a:prstDash val="solid"/>
+                      <a:round/>
+                      <a:headEnd type="none" w="med" len="med"/>
+                      <a:tailEnd type="none" w="med" len="med"/>
+                    </a:lnB>
+                    <a:solidFill>
+                      <a:srgbClr val="FFFFFF"/>
+                    </a:solidFill>
+                  </a:tcPr>
+                </a:tc>
+              </a:tr>
+              <a:tr h="548640">
+                <a:tc>
+                  <a:txBody>
+                    <a:bodyPr/>
+                    <a:lstStyle/>
+                    <a:p>
+                      <a:pPr indent="0" marL="0">
+                        <a:buNone/>
+                      </a:pPr>
+                      <a:r>
+                        <a:rPr lang="en-US" sz="1100" dirty="0">
+                          <a:solidFill>
+                            <a:srgbClr val="1F2226"/>
+                          </a:solidFill>
+                          <a:latin typeface="Arial" pitchFamily="34" charset="0"/>
+                          <a:ea typeface="Arial" pitchFamily="34" charset="-122"/>
+                          <a:cs typeface="Arial" pitchFamily="34" charset="-120"/>
+                        </a:rPr>
+                        <a:t>평가 절차 명확성</a:t>
+                      </a:r>
+                      <a:endParaRPr lang="en-US" sz="1100" dirty="0">
+                        <a:latin typeface="Arial" charset="0"/>
+                        <a:ea typeface="Arial" charset="0"/>
+                        <a:cs typeface="Arial" charset="0"/>
+                      </a:endParaRPr>
+                    </a:p>
+                    <a:p>
+                      <a:pPr indent="0" marL="0">
+                        <a:buNone/>
+                      </a:pPr>
+                      <a:r>
+                        <a:rPr lang="en-US" sz="1100" dirty="0">
+                          <a:solidFill>
+                            <a:srgbClr val="1F2226"/>
+                          </a:solidFill>
+                          <a:latin typeface="Arial" pitchFamily="34" charset="0"/>
+                          <a:ea typeface="Arial" pitchFamily="34" charset="-122"/>
+                          <a:cs typeface="Arial" pitchFamily="34" charset="-120"/>
+                        </a:rPr>
+                        <a:t>(Erdogan 2002 등)</a:t>
+                      </a:r>
+                      <a:endParaRPr lang="en-US" sz="1100" dirty="0">
+                        <a:latin typeface="Arial" charset="0"/>
+                        <a:ea typeface="Arial" charset="0"/>
+                        <a:cs typeface="Arial" charset="0"/>
+                      </a:endParaRPr>
+                    </a:p>
+                  </a:txBody>
+                  <a:tcPr marL="101600" marR="101600" marT="50800" marB="50800" anchor="ctr">
+                    <a:lnL w="9525" cap="flat" cmpd="sng" algn="ctr">
+                      <a:solidFill>
+                        <a:srgbClr val="C9CDD3"/>
+                      </a:solidFill>
+                      <a:prstDash val="solid"/>
+                      <a:round/>
+                      <a:headEnd type="none" w="med" len="med"/>
+                      <a:tailEnd type="none" w="med" len="med"/>
+                    </a:lnL>
+                    <a:lnR w="9525" cap="flat" cmpd="sng" algn="ctr">
+                      <a:solidFill>
+                        <a:srgbClr val="C9CDD3"/>
+                      </a:solidFill>
+                      <a:prstDash val="solid"/>
+                      <a:round/>
+                      <a:headEnd type="none" w="med" len="med"/>
+                      <a:tailEnd type="none" w="med" len="med"/>
+                    </a:lnR>
+                    <a:lnT w="9525" cap="flat" cmpd="sng" algn="ctr">
+                      <a:solidFill>
+                        <a:srgbClr val="C9CDD3"/>
+                      </a:solidFill>
+                      <a:prstDash val="solid"/>
+                      <a:round/>
+                      <a:headEnd type="none" w="med" len="med"/>
+                      <a:tailEnd type="none" w="med" len="med"/>
+                    </a:lnT>
+                    <a:lnB w="9525" cap="flat" cmpd="sng" algn="ctr">
+                      <a:solidFill>
+                        <a:srgbClr val="C9CDD3"/>
+                      </a:solidFill>
+                      <a:prstDash val="solid"/>
+                      <a:round/>
+                      <a:headEnd type="none" w="med" len="med"/>
+                      <a:tailEnd type="none" w="med" len="med"/>
+                    </a:lnB>
+                    <a:solidFill>
+                      <a:srgbClr val="FFFFFF"/>
+                    </a:solidFill>
+                  </a:tcPr>
+                </a:tc>
+                <a:tc>
+                  <a:txBody>
+                    <a:bodyPr/>
+                    <a:lstStyle/>
+                    <a:p>
+                      <a:pPr indent="0" marL="0">
+                        <a:buNone/>
+                      </a:pPr>
+                      <a:r>
+                        <a:rPr lang="en-US" sz="1100" dirty="0">
+                          <a:solidFill>
+                            <a:srgbClr val="1F2226"/>
+                          </a:solidFill>
+                          <a:latin typeface="Arial" pitchFamily="34" charset="0"/>
+                          <a:ea typeface="Arial" pitchFamily="34" charset="-122"/>
+                          <a:cs typeface="Arial" pitchFamily="34" charset="-120"/>
+                        </a:rPr>
+                        <a:t>평가 기준의 명확성이 절차공정성 지각의 선행요인으로 작동한다</a:t>
+                      </a:r>
+                      <a:endParaRPr lang="en-US" sz="1100" dirty="0">
+                        <a:latin typeface="Arial" charset="0"/>
+                        <a:ea typeface="Arial" charset="0"/>
+                        <a:cs typeface="Arial" charset="0"/>
+                      </a:endParaRPr>
+                    </a:p>
+                    <a:p>
+                      <a:pPr indent="0" marL="0">
+                        <a:buNone/>
+                      </a:pPr>
+                      <a:r>
+                        <a:rPr lang="en-US" sz="1100" dirty="0">
+                          <a:solidFill>
+                            <a:srgbClr val="1F2226"/>
+                          </a:solidFill>
+                          <a:latin typeface="Arial" pitchFamily="34" charset="0"/>
+                          <a:ea typeface="Arial" pitchFamily="34" charset="-122"/>
+                          <a:cs typeface="Arial" pitchFamily="34" charset="-120"/>
+                        </a:rPr>
+                        <a:t>※ 주효과 선례이며 조절 형식의 직접 실증은 확인되지 않았다 — 한계로 명시</a:t>
+                      </a:r>
+                      <a:endParaRPr lang="en-US" sz="1100" dirty="0">
+                        <a:latin typeface="Arial" charset="0"/>
+                        <a:ea typeface="Arial" charset="0"/>
+                        <a:cs typeface="Arial" charset="0"/>
+                      </a:endParaRPr>
+                    </a:p>
+                  </a:txBody>
+                  <a:tcPr marL="101600" marR="101600" marT="50800" marB="50800" anchor="ctr">
+                    <a:lnL w="9525" cap="flat" cmpd="sng" algn="ctr">
+                      <a:solidFill>
+                        <a:srgbClr val="C9CDD3"/>
+                      </a:solidFill>
+                      <a:prstDash val="solid"/>
+                      <a:round/>
+                      <a:headEnd type="none" w="med" len="med"/>
+                      <a:tailEnd type="none" w="med" len="med"/>
+                    </a:lnL>
+                    <a:lnR w="9525" cap="flat" cmpd="sng" algn="ctr">
+                      <a:solidFill>
+                        <a:srgbClr val="C9CDD3"/>
+                      </a:solidFill>
+                      <a:prstDash val="solid"/>
+                      <a:round/>
+                      <a:headEnd type="none" w="med" len="med"/>
+                      <a:tailEnd type="none" w="med" len="med"/>
+                    </a:lnR>
+                    <a:lnT w="9525" cap="flat" cmpd="sng" algn="ctr">
+                      <a:solidFill>
+                        <a:srgbClr val="C9CDD3"/>
+                      </a:solidFill>
+                      <a:prstDash val="solid"/>
+                      <a:round/>
+                      <a:headEnd type="none" w="med" len="med"/>
+                      <a:tailEnd type="none" w="med" len="med"/>
+                    </a:lnT>
+                    <a:lnB w="9525" cap="flat" cmpd="sng" algn="ctr">
+                      <a:solidFill>
+                        <a:srgbClr val="C9CDD3"/>
+                      </a:solidFill>
+                      <a:prstDash val="solid"/>
+                      <a:round/>
+                      <a:headEnd type="none" w="med" len="med"/>
+                      <a:tailEnd type="none" w="med" len="med"/>
+                    </a:lnB>
+                    <a:solidFill>
+                      <a:srgbClr val="FFFFFF"/>
+                    </a:solidFill>
+                  </a:tcPr>
+                </a:tc>
+                <a:tc>
+                  <a:txBody>
+                    <a:bodyPr/>
+                    <a:lstStyle/>
+                    <a:p>
+                      <a:pPr indent="0" marL="0">
+                        <a:buNone/>
+                      </a:pPr>
+                      <a:r>
+                        <a:rPr lang="en-US" sz="1100" dirty="0">
+                          <a:solidFill>
+                            <a:srgbClr val="1F2226"/>
+                          </a:solidFill>
+                          <a:latin typeface="Arial" pitchFamily="34" charset="0"/>
+                          <a:ea typeface="Arial" pitchFamily="34" charset="-122"/>
+                          <a:cs typeface="Arial" pitchFamily="34" charset="-120"/>
+                        </a:rPr>
+                        <a:t>MOD → a경로 조절 (H4)</a:t>
+                      </a:r>
+                      <a:endParaRPr lang="en-US" sz="1100" dirty="0">
+                        <a:latin typeface="Arial" charset="0"/>
+                        <a:ea typeface="Arial" charset="0"/>
+                        <a:cs typeface="Arial" charset="0"/>
+                      </a:endParaRPr>
+                    </a:p>
+                  </a:txBody>
+                  <a:tcPr marL="101600" marR="101600" marT="50800" marB="50800" anchor="ctr">
+                    <a:lnL w="9525" cap="flat" cmpd="sng" algn="ctr">
+                      <a:solidFill>
+                        <a:srgbClr val="C9CDD3"/>
+                      </a:solidFill>
+                      <a:prstDash val="solid"/>
+                      <a:round/>
+                      <a:headEnd type="none" w="med" len="med"/>
+                      <a:tailEnd type="none" w="med" len="med"/>
+                    </a:lnL>
+                    <a:lnR w="9525" cap="flat" cmpd="sng" algn="ctr">
+                      <a:solidFill>
+                        <a:srgbClr val="C9CDD3"/>
+                      </a:solidFill>
+                      <a:prstDash val="solid"/>
+                      <a:round/>
+                      <a:headEnd type="none" w="med" len="med"/>
+                      <a:tailEnd type="none" w="med" len="med"/>
+                    </a:lnR>
+                    <a:lnT w="9525" cap="flat" cmpd="sng" algn="ctr">
+                      <a:solidFill>
+                        <a:srgbClr val="C9CDD3"/>
+                      </a:solidFill>
+                      <a:prstDash val="solid"/>
+                      <a:round/>
+                      <a:headEnd type="none" w="med" len="med"/>
+                      <a:tailEnd type="none" w="med" len="med"/>
+                    </a:lnT>
+                    <a:lnB w="9525" cap="flat" cmpd="sng" algn="ctr">
+                      <a:solidFill>
+                        <a:srgbClr val="C9CDD3"/>
+                      </a:solidFill>
+                      <a:prstDash val="solid"/>
+                      <a:round/>
+                      <a:headEnd type="none" w="med" len="med"/>
+                      <a:tailEnd type="none" w="med" len="med"/>
+                    </a:lnB>
+                    <a:solidFill>
+                      <a:srgbClr val="FFFFFF"/>
+                    </a:solidFill>
+                  </a:tcPr>
+                </a:tc>
+              </a:tr>
+              <a:tr h="548640">
+                <a:tc>
+                  <a:txBody>
+                    <a:bodyPr/>
+                    <a:lstStyle/>
+                    <a:p>
+                      <a:pPr indent="0" marL="0">
+                        <a:buNone/>
+                      </a:pPr>
+                      <a:r>
+                        <a:rPr lang="en-US" sz="1100" dirty="0">
+                          <a:solidFill>
+                            <a:srgbClr val="1F2226"/>
+                          </a:solidFill>
+                          <a:latin typeface="Arial" pitchFamily="34" charset="0"/>
+                          <a:ea typeface="Arial" pitchFamily="34" charset="-122"/>
+                          <a:cs typeface="Arial" pitchFamily="34" charset="-120"/>
+                        </a:rPr>
+                        <a:t>불확실성 관리 이론</a:t>
+                      </a:r>
+                      <a:endParaRPr lang="en-US" sz="1100" dirty="0">
+                        <a:latin typeface="Arial" charset="0"/>
+                        <a:ea typeface="Arial" charset="0"/>
+                        <a:cs typeface="Arial" charset="0"/>
+                      </a:endParaRPr>
+                    </a:p>
+                    <a:p>
+                      <a:pPr indent="0" marL="0">
+                        <a:buNone/>
+                      </a:pPr>
+                      <a:r>
+                        <a:rPr lang="en-US" sz="1100" dirty="0">
+                          <a:solidFill>
+                            <a:srgbClr val="1F2226"/>
+                          </a:solidFill>
+                          <a:latin typeface="Arial" pitchFamily="34" charset="0"/>
+                          <a:ea typeface="Arial" pitchFamily="34" charset="-122"/>
+                          <a:cs typeface="Arial" pitchFamily="34" charset="-120"/>
+                        </a:rPr>
+                        <a:t>(Lind &amp; van den Bos, 2002)</a:t>
+                      </a:r>
+                      <a:endParaRPr lang="en-US" sz="1100" dirty="0">
+                        <a:latin typeface="Arial" charset="0"/>
+                        <a:ea typeface="Arial" charset="0"/>
+                        <a:cs typeface="Arial" charset="0"/>
+                      </a:endParaRPr>
+                    </a:p>
+                  </a:txBody>
+                  <a:tcPr marL="101600" marR="101600" marT="50800" marB="50800" anchor="ctr">
+                    <a:lnL w="9525" cap="flat" cmpd="sng" algn="ctr">
+                      <a:solidFill>
+                        <a:srgbClr val="C9CDD3"/>
+                      </a:solidFill>
+                      <a:prstDash val="solid"/>
+                      <a:round/>
+                      <a:headEnd type="none" w="med" len="med"/>
+                      <a:tailEnd type="none" w="med" len="med"/>
+                    </a:lnL>
+                    <a:lnR w="9525" cap="flat" cmpd="sng" algn="ctr">
+                      <a:solidFill>
+                        <a:srgbClr val="C9CDD3"/>
+                      </a:solidFill>
+                      <a:prstDash val="solid"/>
+                      <a:round/>
+                      <a:headEnd type="none" w="med" len="med"/>
+                      <a:tailEnd type="none" w="med" len="med"/>
+                    </a:lnR>
+                    <a:lnT w="9525" cap="flat" cmpd="sng" algn="ctr">
+                      <a:solidFill>
+                        <a:srgbClr val="C9CDD3"/>
+                      </a:solidFill>
+                      <a:prstDash val="solid"/>
+                      <a:round/>
+                      <a:headEnd type="none" w="med" len="med"/>
+                      <a:tailEnd type="none" w="med" len="med"/>
+                    </a:lnT>
+                    <a:lnB w="9525" cap="flat" cmpd="sng" algn="ctr">
+                      <a:solidFill>
+                        <a:srgbClr val="C9CDD3"/>
+                      </a:solidFill>
+                      <a:prstDash val="solid"/>
+                      <a:round/>
+                      <a:headEnd type="none" w="med" len="med"/>
+                      <a:tailEnd type="none" w="med" len="med"/>
+                    </a:lnB>
+                    <a:solidFill>
+                      <a:srgbClr val="FFFFFF"/>
+                    </a:solidFill>
+                  </a:tcPr>
+                </a:tc>
+                <a:tc>
+                  <a:txBody>
+                    <a:bodyPr/>
+                    <a:lstStyle/>
+                    <a:p>
+                      <a:pPr indent="0" marL="0">
+                        <a:buNone/>
+                      </a:pPr>
+                      <a:r>
+                        <a:rPr lang="en-US" sz="1100" dirty="0">
+                          <a:solidFill>
+                            <a:srgbClr val="1F2226"/>
+                          </a:solidFill>
+                          <a:latin typeface="Arial" pitchFamily="34" charset="0"/>
+                          <a:ea typeface="Arial" pitchFamily="34" charset="-122"/>
+                          <a:cs typeface="Arial" pitchFamily="34" charset="-120"/>
+                        </a:rPr>
+                        <a:t>불확실성이 공정성 판단의 중요도를 높인다는 것을 보였다</a:t>
+                      </a:r>
+                      <a:endParaRPr lang="en-US" sz="1100" dirty="0">
+                        <a:latin typeface="Arial" charset="0"/>
+                        <a:ea typeface="Arial" charset="0"/>
+                        <a:cs typeface="Arial" charset="0"/>
+                      </a:endParaRPr>
+                    </a:p>
+                    <a:p>
+                      <a:pPr indent="0" marL="0">
+                        <a:buNone/>
+                      </a:pPr>
+                      <a:r>
+                        <a:rPr lang="en-US" sz="1100" dirty="0">
+                          <a:solidFill>
+                            <a:srgbClr val="1F2226"/>
+                          </a:solidFill>
+                          <a:latin typeface="Arial" pitchFamily="34" charset="0"/>
+                          <a:ea typeface="Arial" pitchFamily="34" charset="-122"/>
+                          <a:cs typeface="Arial" pitchFamily="34" charset="-120"/>
+                        </a:rPr>
+                        <a:t>다만 불확실성을 공정성 효과의 조절 조건으로 놓는 이론이므로 이론 층이 아니다</a:t>
+                      </a:r>
+                      <a:endParaRPr lang="en-US" sz="1100" dirty="0">
+                        <a:latin typeface="Arial" charset="0"/>
+                        <a:ea typeface="Arial" charset="0"/>
+                        <a:cs typeface="Arial" charset="0"/>
+                      </a:endParaRPr>
+                    </a:p>
+                  </a:txBody>
+                  <a:tcPr marL="101600" marR="101600" marT="50800" marB="50800" anchor="ctr">
+                    <a:lnL w="9525" cap="flat" cmpd="sng" algn="ctr">
+                      <a:solidFill>
+                        <a:srgbClr val="C9CDD3"/>
+                      </a:solidFill>
+                      <a:prstDash val="solid"/>
+                      <a:round/>
+                      <a:headEnd type="none" w="med" len="med"/>
+                      <a:tailEnd type="none" w="med" len="med"/>
+                    </a:lnL>
+                    <a:lnR w="9525" cap="flat" cmpd="sng" algn="ctr">
+                      <a:solidFill>
+                        <a:srgbClr val="C9CDD3"/>
+                      </a:solidFill>
+                      <a:prstDash val="solid"/>
+                      <a:round/>
+                      <a:headEnd type="none" w="med" len="med"/>
+                      <a:tailEnd type="none" w="med" len="med"/>
+                    </a:lnR>
+                    <a:lnT w="9525" cap="flat" cmpd="sng" algn="ctr">
+                      <a:solidFill>
+                        <a:srgbClr val="C9CDD3"/>
+                      </a:solidFill>
+                      <a:prstDash val="solid"/>
+                      <a:round/>
+                      <a:headEnd type="none" w="med" len="med"/>
+                      <a:tailEnd type="none" w="med" len="med"/>
+                    </a:lnT>
+                    <a:lnB w="9525" cap="flat" cmpd="sng" algn="ctr">
+                      <a:solidFill>
+                        <a:srgbClr val="C9CDD3"/>
+                      </a:solidFill>
+                      <a:prstDash val="solid"/>
+                      <a:round/>
+                      <a:headEnd type="none" w="med" len="med"/>
+                      <a:tailEnd type="none" w="med" len="med"/>
+                    </a:lnB>
+                    <a:solidFill>
+                      <a:srgbClr val="FFFFFF"/>
+                    </a:solidFill>
+                  </a:tcPr>
+                </a:tc>
+                <a:tc>
+                  <a:txBody>
+                    <a:bodyPr/>
+                    <a:lstStyle/>
+                    <a:p>
+                      <a:pPr indent="0" marL="0">
+                        <a:buNone/>
+                      </a:pPr>
+                      <a:r>
+                        <a:rPr lang="en-US" sz="1100" dirty="0">
+                          <a:solidFill>
+                            <a:srgbClr val="1F2226"/>
+                          </a:solidFill>
+                          <a:latin typeface="Arial" pitchFamily="34" charset="0"/>
+                          <a:ea typeface="Arial" pitchFamily="34" charset="-122"/>
+                          <a:cs typeface="Arial" pitchFamily="34" charset="-120"/>
+                        </a:rPr>
+                        <a:t>메커니즘 보조</a:t>
+                      </a:r>
+                      <a:endParaRPr lang="en-US" sz="1100" dirty="0">
+                        <a:latin typeface="Arial" charset="0"/>
+                        <a:ea typeface="Arial" charset="0"/>
+                        <a:cs typeface="Arial" charset="0"/>
+                      </a:endParaRPr>
+                    </a:p>
+                  </a:txBody>
+                  <a:tcPr marL="101600" marR="101600" marT="50800" marB="50800" anchor="ctr">
                     <a:lnL w="9525" cap="flat" cmpd="sng" algn="ctr">
                       <a:solidFill>
                         <a:srgbClr val="C9CDD3"/>
@@ -4228,133 +4724,46 @@
       </p:graphicFrame>
       <p:sp>
         <p:nvSpPr>
-          <p:cNvPr id="11" name="Shape 8"/>
-          <p:cNvSpPr/>
-          <p:nvPr/>
-        </p:nvSpPr>
-        <p:spPr>
-          <a:xfrm>
-            <a:off x="640080" y="5230368"/>
-            <a:ext cx="10927080" cy="932688"/>
-          </a:xfrm>
-          <a:prstGeom prst="rect">
-            <a:avLst/>
-          </a:prstGeom>
-          <a:solidFill>
-            <a:srgbClr val="F7EFEF"/>
-          </a:solidFill>
-          <a:ln w="12700">
-            <a:solidFill>
-              <a:srgbClr val="E2D2D1"/>
-            </a:solidFill>
-            <a:prstDash val="solid"/>
-          </a:ln>
-        </p:spPr>
+          <p:cNvPr id="11" name="Text 8"/>
+          <p:cNvSpPr/>
+          <p:nvPr/>
+        </p:nvSpPr>
+        <p:spPr>
+          <a:xfrm>
+            <a:off x="685800" y="6144768"/>
+            <a:ext cx="10835640" cy="256032"/>
+          </a:xfrm>
+          <a:prstGeom prst="rect">
+            <a:avLst/>
+          </a:prstGeom>
+          <a:noFill/>
+          <a:ln/>
+        </p:spPr>
+        <p:txBody>
+          <a:bodyPr wrap="square" lIns="0" tIns="0" rIns="0" bIns="0" rtlCol="0" anchor="ctr"/>
+          <a:lstStyle/>
+          <a:p>
+            <a:pPr indent="0" marL="0">
+              <a:buNone/>
+            </a:pPr>
+            <a:r>
+              <a:rPr lang="en-US" sz="1150" b="1" dirty="0">
+                <a:solidFill>
+                  <a:srgbClr val="8C2A32"/>
+                </a:solidFill>
+                <a:latin typeface="Arial" pitchFamily="34" charset="0"/>
+                <a:ea typeface="Arial" pitchFamily="34" charset="-122"/>
+                <a:cs typeface="Arial" pitchFamily="34" charset="-120"/>
+              </a:rPr>
+              <a:t>담당 이론이 배정되지 않은 경로는 없다  ·  H2의 매개 배치와 H4의 조절 형식은 직접 실증 선례가 확인되지 않아 한계로 명시한다 (Appendix D)</a:t>
+            </a:r>
+            <a:endParaRPr lang="en-US" sz="1150" dirty="0"/>
+          </a:p>
+        </p:txBody>
       </p:sp>
       <p:sp>
         <p:nvSpPr>
           <p:cNvPr id="12" name="Text 9"/>
-          <p:cNvSpPr/>
-          <p:nvPr/>
-        </p:nvSpPr>
-        <p:spPr>
-          <a:xfrm>
-            <a:off x="914400" y="5358384"/>
-            <a:ext cx="10332720" cy="256032"/>
-          </a:xfrm>
-          <a:prstGeom prst="rect">
-            <a:avLst/>
-          </a:prstGeom>
-          <a:noFill/>
-          <a:ln/>
-        </p:spPr>
-        <p:txBody>
-          <a:bodyPr wrap="square" lIns="0" tIns="0" rIns="0" bIns="0" rtlCol="0" anchor="ctr"/>
-          <a:lstStyle/>
-          <a:p>
-            <a:pPr indent="0" marL="0">
-              <a:buNone/>
-            </a:pPr>
-            <a:r>
-              <a:rPr lang="en-US" sz="1300" b="1" dirty="0">
-                <a:solidFill>
-                  <a:srgbClr val="6B1F26"/>
-                </a:solidFill>
-                <a:latin typeface="Arial" pitchFamily="34" charset="0"/>
-                <a:ea typeface="Arial" pitchFamily="34" charset="-122"/>
-                <a:cs typeface="Arial" pitchFamily="34" charset="-120"/>
-              </a:rPr>
-              <a:t>불확실성 관리 이론(UMT)의 위치</a:t>
-            </a:r>
-            <a:endParaRPr lang="en-US" sz="1300" dirty="0"/>
-          </a:p>
-        </p:txBody>
-      </p:sp>
-      <p:sp>
-        <p:nvSpPr>
-          <p:cNvPr id="13" name="Text 10"/>
-          <p:cNvSpPr/>
-          <p:nvPr/>
-        </p:nvSpPr>
-        <p:spPr>
-          <a:xfrm>
-            <a:off x="914400" y="5632704"/>
-            <a:ext cx="10332720" cy="457200"/>
-          </a:xfrm>
-          <a:prstGeom prst="rect">
-            <a:avLst/>
-          </a:prstGeom>
-          <a:noFill/>
-          <a:ln/>
-        </p:spPr>
-        <p:txBody>
-          <a:bodyPr wrap="square" lIns="0" tIns="0" rIns="0" bIns="0" rtlCol="0" anchor="ctr"/>
-          <a:lstStyle/>
-          <a:p>
-            <a:pPr indent="0" marL="0">
-              <a:lnSpc>
-                <a:spcPts val="1700"/>
-              </a:lnSpc>
-              <a:buNone/>
-            </a:pPr>
-            <a:r>
-              <a:rPr lang="en-US" sz="1150" dirty="0">
-                <a:solidFill>
-                  <a:srgbClr val="1F2226"/>
-                </a:solidFill>
-                <a:latin typeface="Arial" pitchFamily="34" charset="0"/>
-                <a:ea typeface="Arial" pitchFamily="34" charset="-122"/>
-                <a:cs typeface="Arial" pitchFamily="34" charset="-120"/>
-              </a:rPr>
-              <a:t>불확실성이 공정성 판단의 중요도를 높인다는 것은 UMT가 보였다. 다만 UMT는 불확실성을 공정성 효과의 조절 조건으로 놓는 이론이므로,</a:t>
-            </a:r>
-            <a:endParaRPr lang="en-US" sz="1150" dirty="0"/>
-          </a:p>
-          <a:p>
-            <a:pPr indent="0" marL="0">
-              <a:lnSpc>
-                <a:spcPts val="1700"/>
-              </a:lnSpc>
-              <a:buNone/>
-            </a:pPr>
-            <a:r>
-              <a:rPr lang="en-US" sz="1150" dirty="0">
-                <a:solidFill>
-                  <a:srgbClr val="1F2226"/>
-                </a:solidFill>
-                <a:latin typeface="Arial" pitchFamily="34" charset="0"/>
-                <a:ea typeface="Arial" pitchFamily="34" charset="-122"/>
-                <a:cs typeface="Arial" pitchFamily="34" charset="-120"/>
-              </a:rPr>
-              <a:t>본 연구에서는 이론 층이 아니라 메커니즘의 보조 근거로 사용한다.</a:t>
-            </a:r>
-            <a:endParaRPr lang="en-US" sz="1150" dirty="0"/>
-          </a:p>
-        </p:txBody>
-      </p:sp>
-      <p:sp>
-        <p:nvSpPr>
-          <p:cNvPr id="14" name="Text 11"/>
           <p:cNvSpPr/>
           <p:nvPr/>
         </p:nvSpPr>
@@ -7320,7 +7729,7 @@
                 <a:ea typeface="Arial" pitchFamily="34" charset="-122"/>
                 <a:cs typeface="Arial" pitchFamily="34" charset="-120"/>
               </a:rPr>
-              <a:t>조절된 매개 — 상호작용항 + 조건부 간접효과</a:t>
+              <a:t>조절된 매개 — PROCESS Model 7 · 상호작용항(IV×MOD) + 조건부 간접효과</a:t>
             </a:r>
             <a:endParaRPr lang="en-US" sz="1200" dirty="0"/>
           </a:p>
@@ -18101,14 +18510,297 @@
       </p:sp>
       <p:sp>
         <p:nvSpPr>
-          <p:cNvPr id="9" name="Shape 7"/>
-          <p:cNvSpPr/>
-          <p:nvPr/>
-        </p:nvSpPr>
-        <p:spPr>
-          <a:xfrm>
-            <a:off x="640080" y="1975104"/>
-            <a:ext cx="10927080" cy="1298448"/>
+          <p:cNvPr id="9" name="Text 7"/>
+          <p:cNvSpPr/>
+          <p:nvPr/>
+        </p:nvSpPr>
+        <p:spPr>
+          <a:xfrm>
+            <a:off x="640080" y="1883664"/>
+            <a:ext cx="6400800" cy="274320"/>
+          </a:xfrm>
+          <a:prstGeom prst="rect">
+            <a:avLst/>
+          </a:prstGeom>
+          <a:noFill/>
+          <a:ln/>
+        </p:spPr>
+        <p:txBody>
+          <a:bodyPr wrap="square" lIns="0" tIns="0" rIns="0" bIns="0" rtlCol="0" anchor="ctr"/>
+          <a:lstStyle/>
+          <a:p>
+            <a:pPr algn="l" indent="0" marL="0">
+              <a:buNone/>
+            </a:pPr>
+            <a:r>
+              <a:rPr lang="en-US" sz="1300" b="1" dirty="0">
+                <a:solidFill>
+                  <a:srgbClr val="1F2226"/>
+                </a:solidFill>
+                <a:latin typeface="Arial" pitchFamily="34" charset="0"/>
+                <a:ea typeface="Arial" pitchFamily="34" charset="-122"/>
+                <a:cs typeface="Arial" pitchFamily="34" charset="-120"/>
+              </a:rPr>
+              <a:t>【 선행연구에서 본 연구로 — 세 가지 전환 】</a:t>
+            </a:r>
+            <a:endParaRPr lang="en-US" sz="1300" dirty="0"/>
+          </a:p>
+        </p:txBody>
+      </p:sp>
+      <p:sp>
+        <p:nvSpPr>
+          <p:cNvPr id="10" name="Shape 8"/>
+          <p:cNvSpPr/>
+          <p:nvPr/>
+        </p:nvSpPr>
+        <p:spPr>
+          <a:xfrm>
+            <a:off x="658368" y="2359152"/>
+            <a:ext cx="329184" cy="329184"/>
+          </a:xfrm>
+          <a:prstGeom prst="ellipse">
+            <a:avLst/>
+          </a:prstGeom>
+          <a:solidFill>
+            <a:srgbClr val="8C2A32"/>
+          </a:solidFill>
+          <a:ln/>
+        </p:spPr>
+      </p:sp>
+      <p:sp>
+        <p:nvSpPr>
+          <p:cNvPr id="11" name="Text 9"/>
+          <p:cNvSpPr/>
+          <p:nvPr/>
+        </p:nvSpPr>
+        <p:spPr>
+          <a:xfrm>
+            <a:off x="658368" y="2359152"/>
+            <a:ext cx="329184" cy="329184"/>
+          </a:xfrm>
+          <a:prstGeom prst="rect">
+            <a:avLst/>
+          </a:prstGeom>
+          <a:noFill/>
+          <a:ln/>
+        </p:spPr>
+        <p:txBody>
+          <a:bodyPr wrap="square" lIns="0" tIns="0" rIns="0" bIns="0" rtlCol="0" anchor="ctr"/>
+          <a:lstStyle/>
+          <a:p>
+            <a:pPr algn="ctr" indent="0" marL="0">
+              <a:buNone/>
+            </a:pPr>
+            <a:r>
+              <a:rPr lang="en-US" sz="1300" b="1" dirty="0">
+                <a:solidFill>
+                  <a:srgbClr val="FFFFFF"/>
+                </a:solidFill>
+                <a:latin typeface="Arial" pitchFamily="34" charset="0"/>
+                <a:ea typeface="Arial" pitchFamily="34" charset="-122"/>
+                <a:cs typeface="Arial" pitchFamily="34" charset="-120"/>
+              </a:rPr>
+              <a:t>1</a:t>
+            </a:r>
+            <a:endParaRPr lang="en-US" sz="1300" dirty="0"/>
+          </a:p>
+        </p:txBody>
+      </p:sp>
+      <p:sp>
+        <p:nvSpPr>
+          <p:cNvPr id="12" name="Text 10"/>
+          <p:cNvSpPr/>
+          <p:nvPr/>
+        </p:nvSpPr>
+        <p:spPr>
+          <a:xfrm>
+            <a:off x="640080" y="2743200"/>
+            <a:ext cx="1371600" cy="256032"/>
+          </a:xfrm>
+          <a:prstGeom prst="rect">
+            <a:avLst/>
+          </a:prstGeom>
+          <a:noFill/>
+          <a:ln/>
+        </p:spPr>
+        <p:txBody>
+          <a:bodyPr wrap="square" lIns="0" tIns="0" rIns="0" bIns="0" rtlCol="0" anchor="ctr"/>
+          <a:lstStyle/>
+          <a:p>
+            <a:pPr algn="ctr" indent="0" marL="0">
+              <a:buNone/>
+            </a:pPr>
+            <a:r>
+              <a:rPr lang="en-US" sz="1150" b="1" dirty="0">
+                <a:solidFill>
+                  <a:srgbClr val="8C2A32"/>
+                </a:solidFill>
+                <a:latin typeface="Arial" pitchFamily="34" charset="0"/>
+                <a:ea typeface="Arial" pitchFamily="34" charset="-122"/>
+                <a:cs typeface="Arial" pitchFamily="34" charset="-120"/>
+              </a:rPr>
+              <a:t>질문의 전환</a:t>
+            </a:r>
+            <a:endParaRPr lang="en-US" sz="1150" dirty="0"/>
+          </a:p>
+        </p:txBody>
+      </p:sp>
+      <p:sp>
+        <p:nvSpPr>
+          <p:cNvPr id="13" name="Shape 11"/>
+          <p:cNvSpPr/>
+          <p:nvPr/>
+        </p:nvSpPr>
+        <p:spPr>
+          <a:xfrm>
+            <a:off x="2103120" y="2231136"/>
+            <a:ext cx="3977640" cy="859536"/>
+          </a:xfrm>
+          <a:prstGeom prst="rect">
+            <a:avLst/>
+          </a:prstGeom>
+          <a:solidFill>
+            <a:srgbClr val="F4F5F7"/>
+          </a:solidFill>
+          <a:ln w="12700">
+            <a:solidFill>
+              <a:srgbClr val="C9CDD3"/>
+            </a:solidFill>
+            <a:prstDash val="solid"/>
+          </a:ln>
+        </p:spPr>
+      </p:sp>
+      <p:sp>
+        <p:nvSpPr>
+          <p:cNvPr id="14" name="Text 12"/>
+          <p:cNvSpPr/>
+          <p:nvPr/>
+        </p:nvSpPr>
+        <p:spPr>
+          <a:xfrm>
+            <a:off x="2304288" y="2322576"/>
+            <a:ext cx="3566160" cy="219456"/>
+          </a:xfrm>
+          <a:prstGeom prst="rect">
+            <a:avLst/>
+          </a:prstGeom>
+          <a:noFill/>
+          <a:ln/>
+        </p:spPr>
+        <p:txBody>
+          <a:bodyPr wrap="square" lIns="0" tIns="0" rIns="0" bIns="0" rtlCol="0" anchor="ctr"/>
+          <a:lstStyle/>
+          <a:p>
+            <a:pPr indent="0" marL="0">
+              <a:buNone/>
+            </a:pPr>
+            <a:r>
+              <a:rPr lang="en-US" sz="1000" dirty="0">
+                <a:solidFill>
+                  <a:srgbClr val="70757C"/>
+                </a:solidFill>
+                <a:latin typeface="Arial" pitchFamily="34" charset="0"/>
+                <a:ea typeface="Arial" pitchFamily="34" charset="-122"/>
+                <a:cs typeface="Arial" pitchFamily="34" charset="-120"/>
+              </a:rPr>
+              <a:t>지금까지</a:t>
+            </a:r>
+            <a:endParaRPr lang="en-US" sz="1000" dirty="0"/>
+          </a:p>
+        </p:txBody>
+      </p:sp>
+      <p:sp>
+        <p:nvSpPr>
+          <p:cNvPr id="15" name="Text 13"/>
+          <p:cNvSpPr/>
+          <p:nvPr/>
+        </p:nvSpPr>
+        <p:spPr>
+          <a:xfrm>
+            <a:off x="2304288" y="2542032"/>
+            <a:ext cx="3611880" cy="475488"/>
+          </a:xfrm>
+          <a:prstGeom prst="rect">
+            <a:avLst/>
+          </a:prstGeom>
+          <a:noFill/>
+          <a:ln/>
+        </p:spPr>
+        <p:txBody>
+          <a:bodyPr wrap="square" lIns="0" tIns="0" rIns="0" bIns="0" rtlCol="0" anchor="ctr"/>
+          <a:lstStyle/>
+          <a:p>
+            <a:pPr indent="0" marL="0">
+              <a:lnSpc>
+                <a:spcPts val="1700"/>
+              </a:lnSpc>
+              <a:buNone/>
+            </a:pPr>
+            <a:r>
+              <a:rPr lang="en-US" sz="1250" dirty="0">
+                <a:solidFill>
+                  <a:srgbClr val="1F2226"/>
+                </a:solidFill>
+                <a:latin typeface="Arial" pitchFamily="34" charset="0"/>
+                <a:ea typeface="Arial" pitchFamily="34" charset="-122"/>
+                <a:cs typeface="Arial" pitchFamily="34" charset="-120"/>
+              </a:rPr>
+              <a:t>「AI에게 얼마의 크레딧을 줄 것인가」</a:t>
+            </a:r>
+            <a:endParaRPr lang="en-US" sz="1250" dirty="0"/>
+          </a:p>
+          <a:p>
+            <a:pPr indent="0" marL="0">
+              <a:lnSpc>
+                <a:spcPts val="1700"/>
+              </a:lnSpc>
+              <a:buNone/>
+            </a:pPr>
+            <a:r>
+              <a:rPr lang="en-US" sz="1250" dirty="0">
+                <a:solidFill>
+                  <a:srgbClr val="1F2226"/>
+                </a:solidFill>
+                <a:latin typeface="Arial" pitchFamily="34" charset="0"/>
+                <a:ea typeface="Arial" pitchFamily="34" charset="-122"/>
+                <a:cs typeface="Arial" pitchFamily="34" charset="-120"/>
+              </a:rPr>
+              <a:t>— 배분의 문제</a:t>
+            </a:r>
+            <a:endParaRPr lang="en-US" sz="1250" dirty="0"/>
+          </a:p>
+        </p:txBody>
+      </p:sp>
+      <p:sp>
+        <p:nvSpPr>
+          <p:cNvPr id="16" name="Shape 14"/>
+          <p:cNvSpPr/>
+          <p:nvPr/>
+        </p:nvSpPr>
+        <p:spPr>
+          <a:xfrm rot="5400000">
+            <a:off x="6272784" y="2560320"/>
+            <a:ext cx="237744" cy="201168"/>
+          </a:xfrm>
+          <a:prstGeom prst="triangle">
+            <a:avLst/>
+          </a:prstGeom>
+          <a:solidFill>
+            <a:srgbClr val="8C2A32"/>
+          </a:solidFill>
+          <a:ln/>
+        </p:spPr>
+      </p:sp>
+      <p:sp>
+        <p:nvSpPr>
+          <p:cNvPr id="17" name="Shape 15"/>
+          <p:cNvSpPr/>
+          <p:nvPr/>
+        </p:nvSpPr>
+        <p:spPr>
+          <a:xfrm>
+            <a:off x="6720840" y="2231136"/>
+            <a:ext cx="4828032" cy="859536"/>
           </a:xfrm>
           <a:prstGeom prst="rect">
             <a:avLst/>
@@ -18126,14 +18818,14 @@
       </p:sp>
       <p:sp>
         <p:nvSpPr>
-          <p:cNvPr id="10" name="Text 8"/>
-          <p:cNvSpPr/>
-          <p:nvPr/>
-        </p:nvSpPr>
-        <p:spPr>
-          <a:xfrm>
-            <a:off x="914400" y="2121408"/>
-            <a:ext cx="365760" cy="292608"/>
+          <p:cNvPr id="18" name="Text 16"/>
+          <p:cNvSpPr/>
+          <p:nvPr/>
+        </p:nvSpPr>
+        <p:spPr>
+          <a:xfrm>
+            <a:off x="6922008" y="2322576"/>
+            <a:ext cx="4480560" cy="219456"/>
           </a:xfrm>
           <a:prstGeom prst="rect">
             <a:avLst/>
@@ -18149,7 +18841,7 @@
               <a:buNone/>
             </a:pPr>
             <a:r>
-              <a:rPr lang="en-US" sz="1500" b="1" dirty="0">
+              <a:rPr lang="en-US" sz="1000" b="1" dirty="0">
                 <a:solidFill>
                   <a:srgbClr val="8C2A32"/>
                 </a:solidFill>
@@ -18157,61 +18849,22 @@
                 <a:ea typeface="Arial" pitchFamily="34" charset="-122"/>
                 <a:cs typeface="Arial" pitchFamily="34" charset="-120"/>
               </a:rPr>
-              <a:t>1</a:t>
-            </a:r>
-            <a:endParaRPr lang="en-US" sz="1500" dirty="0"/>
-          </a:p>
-        </p:txBody>
-      </p:sp>
-      <p:sp>
-        <p:nvSpPr>
-          <p:cNvPr id="11" name="Text 9"/>
-          <p:cNvSpPr/>
-          <p:nvPr/>
-        </p:nvSpPr>
-        <p:spPr>
-          <a:xfrm>
-            <a:off x="1325880" y="2112264"/>
-            <a:ext cx="9875520" cy="292608"/>
-          </a:xfrm>
-          <a:prstGeom prst="rect">
-            <a:avLst/>
-          </a:prstGeom>
-          <a:noFill/>
-          <a:ln/>
-        </p:spPr>
-        <p:txBody>
-          <a:bodyPr wrap="square" lIns="0" tIns="0" rIns="0" bIns="0" rtlCol="0" anchor="ctr"/>
-          <a:lstStyle/>
-          <a:p>
-            <a:pPr indent="0" marL="0">
-              <a:buNone/>
-            </a:pPr>
-            <a:r>
-              <a:rPr lang="en-US" sz="1450" b="1" dirty="0">
-                <a:solidFill>
-                  <a:srgbClr val="1F2226"/>
-                </a:solidFill>
-                <a:latin typeface="Arial" pitchFamily="34" charset="0"/>
-                <a:ea typeface="Arial" pitchFamily="34" charset="-122"/>
-                <a:cs typeface="Arial" pitchFamily="34" charset="-120"/>
-              </a:rPr>
-              <a:t>귀속 문제를 조직 공정성의 문제로 재정의한다</a:t>
-            </a:r>
-            <a:endParaRPr lang="en-US" sz="1450" dirty="0"/>
-          </a:p>
-        </p:txBody>
-      </p:sp>
-      <p:sp>
-        <p:nvSpPr>
-          <p:cNvPr id="12" name="Text 10"/>
-          <p:cNvSpPr/>
-          <p:nvPr/>
-        </p:nvSpPr>
-        <p:spPr>
-          <a:xfrm>
-            <a:off x="1325880" y="2450592"/>
-            <a:ext cx="9875520" cy="420624"/>
+              <a:t>본 연구</a:t>
+            </a:r>
+            <a:endParaRPr lang="en-US" sz="1000" dirty="0"/>
+          </a:p>
+        </p:txBody>
+      </p:sp>
+      <p:sp>
+        <p:nvSpPr>
+          <p:cNvPr id="19" name="Text 17"/>
+          <p:cNvSpPr/>
+          <p:nvPr/>
+        </p:nvSpPr>
+        <p:spPr>
+          <a:xfrm>
+            <a:off x="6922008" y="2542032"/>
+            <a:ext cx="4462272" cy="475488"/>
           </a:xfrm>
           <a:prstGeom prst="rect">
             <a:avLst/>
@@ -18225,20 +18878,177 @@
           <a:p>
             <a:pPr indent="0" marL="0">
               <a:lnSpc>
-                <a:spcPts val="1600"/>
+                <a:spcPts val="1700"/>
               </a:lnSpc>
               <a:buNone/>
             </a:pPr>
             <a:r>
-              <a:rPr lang="en-US" sz="1150" dirty="0">
-                <a:solidFill>
-                  <a:srgbClr val="70757C"/>
-                </a:solidFill>
-                <a:latin typeface="Arial" pitchFamily="34" charset="0"/>
-                <a:ea typeface="Arial" pitchFamily="34" charset="-122"/>
-                <a:cs typeface="Arial" pitchFamily="34" charset="-120"/>
-              </a:rPr>
-              <a:t>선행연구는 「AI에게 얼마의 크레딧을 줄 것인가」를 물었다. 본 연구는 「그 귀속이 어려울 때 평가받는 사람이 제도를 어떻게 지각하는가」로 질문을 옮긴다</a:t>
+              <a:rPr lang="en-US" sz="1250" b="1" dirty="0">
+                <a:solidFill>
+                  <a:srgbClr val="1F2226"/>
+                </a:solidFill>
+                <a:latin typeface="Arial" pitchFamily="34" charset="0"/>
+                <a:ea typeface="Arial" pitchFamily="34" charset="-122"/>
+                <a:cs typeface="Arial" pitchFamily="34" charset="-120"/>
+              </a:rPr>
+              <a:t>「그 귀속이 어려울 때 평가받는 사람이</a:t>
+            </a:r>
+            <a:endParaRPr lang="en-US" sz="1250" dirty="0"/>
+          </a:p>
+          <a:p>
+            <a:pPr indent="0" marL="0">
+              <a:lnSpc>
+                <a:spcPts val="1700"/>
+              </a:lnSpc>
+              <a:buNone/>
+            </a:pPr>
+            <a:r>
+              <a:rPr lang="en-US" sz="1250" b="1" dirty="0">
+                <a:solidFill>
+                  <a:srgbClr val="1F2226"/>
+                </a:solidFill>
+                <a:latin typeface="Arial" pitchFamily="34" charset="0"/>
+                <a:ea typeface="Arial" pitchFamily="34" charset="-122"/>
+                <a:cs typeface="Arial" pitchFamily="34" charset="-120"/>
+              </a:rPr>
+              <a:t>제도를 어떻게 지각하는가」— 공정성의 문제</a:t>
+            </a:r>
+            <a:endParaRPr lang="en-US" sz="1250" dirty="0"/>
+          </a:p>
+        </p:txBody>
+      </p:sp>
+      <p:sp>
+        <p:nvSpPr>
+          <p:cNvPr id="20" name="Text 18"/>
+          <p:cNvSpPr/>
+          <p:nvPr/>
+        </p:nvSpPr>
+        <p:spPr>
+          <a:xfrm>
+            <a:off x="2103120" y="3145536"/>
+            <a:ext cx="9418320" cy="256032"/>
+          </a:xfrm>
+          <a:prstGeom prst="rect">
+            <a:avLst/>
+          </a:prstGeom>
+          <a:noFill/>
+          <a:ln/>
+        </p:spPr>
+        <p:txBody>
+          <a:bodyPr wrap="square" lIns="0" tIns="0" rIns="0" bIns="0" rtlCol="0" anchor="ctr"/>
+          <a:lstStyle/>
+          <a:p>
+            <a:pPr indent="0" marL="0">
+              <a:buNone/>
+            </a:pPr>
+            <a:r>
+              <a:rPr lang="en-US" sz="1200" b="1" dirty="0">
+                <a:solidFill>
+                  <a:srgbClr val="6B1F26"/>
+                </a:solidFill>
+                <a:latin typeface="Arial" pitchFamily="34" charset="0"/>
+                <a:ea typeface="Arial" pitchFamily="34" charset="-122"/>
+                <a:cs typeface="Arial" pitchFamily="34" charset="-120"/>
+              </a:rPr>
+              <a:t>→   조직공정성이 축적한 이론과 측정 도구를 이 현상에 쓸 수 있게 된다</a:t>
+            </a:r>
+            <a:endParaRPr lang="en-US" sz="1200" dirty="0"/>
+          </a:p>
+        </p:txBody>
+      </p:sp>
+      <p:sp>
+        <p:nvSpPr>
+          <p:cNvPr id="21" name="Shape 19"/>
+          <p:cNvSpPr/>
+          <p:nvPr/>
+        </p:nvSpPr>
+        <p:spPr>
+          <a:xfrm>
+            <a:off x="658368" y="3712464"/>
+            <a:ext cx="329184" cy="329184"/>
+          </a:xfrm>
+          <a:prstGeom prst="ellipse">
+            <a:avLst/>
+          </a:prstGeom>
+          <a:solidFill>
+            <a:srgbClr val="8C2A32"/>
+          </a:solidFill>
+          <a:ln/>
+        </p:spPr>
+      </p:sp>
+      <p:sp>
+        <p:nvSpPr>
+          <p:cNvPr id="22" name="Text 20"/>
+          <p:cNvSpPr/>
+          <p:nvPr/>
+        </p:nvSpPr>
+        <p:spPr>
+          <a:xfrm>
+            <a:off x="658368" y="3712464"/>
+            <a:ext cx="329184" cy="329184"/>
+          </a:xfrm>
+          <a:prstGeom prst="rect">
+            <a:avLst/>
+          </a:prstGeom>
+          <a:noFill/>
+          <a:ln/>
+        </p:spPr>
+        <p:txBody>
+          <a:bodyPr wrap="square" lIns="0" tIns="0" rIns="0" bIns="0" rtlCol="0" anchor="ctr"/>
+          <a:lstStyle/>
+          <a:p>
+            <a:pPr algn="ctr" indent="0" marL="0">
+              <a:buNone/>
+            </a:pPr>
+            <a:r>
+              <a:rPr lang="en-US" sz="1300" b="1" dirty="0">
+                <a:solidFill>
+                  <a:srgbClr val="FFFFFF"/>
+                </a:solidFill>
+                <a:latin typeface="Arial" pitchFamily="34" charset="0"/>
+                <a:ea typeface="Arial" pitchFamily="34" charset="-122"/>
+                <a:cs typeface="Arial" pitchFamily="34" charset="-120"/>
+              </a:rPr>
+              <a:t>2</a:t>
+            </a:r>
+            <a:endParaRPr lang="en-US" sz="1300" dirty="0"/>
+          </a:p>
+        </p:txBody>
+      </p:sp>
+      <p:sp>
+        <p:nvSpPr>
+          <p:cNvPr id="23" name="Text 21"/>
+          <p:cNvSpPr/>
+          <p:nvPr/>
+        </p:nvSpPr>
+        <p:spPr>
+          <a:xfrm>
+            <a:off x="640080" y="4096512"/>
+            <a:ext cx="1371600" cy="256032"/>
+          </a:xfrm>
+          <a:prstGeom prst="rect">
+            <a:avLst/>
+          </a:prstGeom>
+          <a:noFill/>
+          <a:ln/>
+        </p:spPr>
+        <p:txBody>
+          <a:bodyPr wrap="square" lIns="0" tIns="0" rIns="0" bIns="0" rtlCol="0" anchor="ctr"/>
+          <a:lstStyle/>
+          <a:p>
+            <a:pPr algn="ctr" indent="0" marL="0">
+              <a:buNone/>
+            </a:pPr>
+            <a:r>
+              <a:rPr lang="en-US" sz="1150" b="1" dirty="0">
+                <a:solidFill>
+                  <a:srgbClr val="8C2A32"/>
+                </a:solidFill>
+                <a:latin typeface="Arial" pitchFamily="34" charset="0"/>
+                <a:ea typeface="Arial" pitchFamily="34" charset="-122"/>
+                <a:cs typeface="Arial" pitchFamily="34" charset="-120"/>
+              </a:rPr>
+              <a:t>출처의 전환</a:t>
             </a:r>
             <a:endParaRPr lang="en-US" sz="1150" dirty="0"/>
           </a:p>
@@ -18246,53 +19056,14 @@
       </p:sp>
       <p:sp>
         <p:nvSpPr>
-          <p:cNvPr id="13" name="Text 11"/>
-          <p:cNvSpPr/>
-          <p:nvPr/>
-        </p:nvSpPr>
-        <p:spPr>
-          <a:xfrm>
-            <a:off x="1325880" y="2907792"/>
-            <a:ext cx="9875520" cy="292608"/>
-          </a:xfrm>
-          <a:prstGeom prst="rect">
-            <a:avLst/>
-          </a:prstGeom>
-          <a:noFill/>
-          <a:ln/>
-        </p:spPr>
-        <p:txBody>
-          <a:bodyPr wrap="square" lIns="0" tIns="0" rIns="0" bIns="0" rtlCol="0" anchor="ctr"/>
-          <a:lstStyle/>
-          <a:p>
-            <a:pPr indent="0" marL="0">
-              <a:buNone/>
-            </a:pPr>
-            <a:r>
-              <a:rPr lang="en-US" sz="1250" b="1" dirty="0">
-                <a:solidFill>
-                  <a:srgbClr val="6B1F26"/>
-                </a:solidFill>
-                <a:latin typeface="Arial" pitchFamily="34" charset="0"/>
-                <a:ea typeface="Arial" pitchFamily="34" charset="-122"/>
-                <a:cs typeface="Arial" pitchFamily="34" charset="-120"/>
-              </a:rPr>
-              <a:t>→  조직공정성 연구가 축적한 이론과 측정 도구를 이 현상에 쓸 수 있게 된다</a:t>
-            </a:r>
-            <a:endParaRPr lang="en-US" sz="1250" dirty="0"/>
-          </a:p>
-        </p:txBody>
-      </p:sp>
-      <p:sp>
-        <p:nvSpPr>
-          <p:cNvPr id="14" name="Shape 12"/>
-          <p:cNvSpPr/>
-          <p:nvPr/>
-        </p:nvSpPr>
-        <p:spPr>
-          <a:xfrm>
-            <a:off x="640080" y="3374136"/>
-            <a:ext cx="10927080" cy="1298448"/>
+          <p:cNvPr id="24" name="Shape 22"/>
+          <p:cNvSpPr/>
+          <p:nvPr/>
+        </p:nvSpPr>
+        <p:spPr>
+          <a:xfrm>
+            <a:off x="2103120" y="3584448"/>
+            <a:ext cx="3977640" cy="859536"/>
           </a:xfrm>
           <a:prstGeom prst="rect">
             <a:avLst/>
@@ -18310,14 +19081,14 @@
       </p:sp>
       <p:sp>
         <p:nvSpPr>
-          <p:cNvPr id="15" name="Text 13"/>
-          <p:cNvSpPr/>
-          <p:nvPr/>
-        </p:nvSpPr>
-        <p:spPr>
-          <a:xfrm>
-            <a:off x="914400" y="3520440"/>
-            <a:ext cx="365760" cy="292608"/>
+          <p:cNvPr id="25" name="Text 23"/>
+          <p:cNvSpPr/>
+          <p:nvPr/>
+        </p:nvSpPr>
+        <p:spPr>
+          <a:xfrm>
+            <a:off x="2304288" y="3675888"/>
+            <a:ext cx="3566160" cy="219456"/>
           </a:xfrm>
           <a:prstGeom prst="rect">
             <a:avLst/>
@@ -18333,69 +19104,30 @@
               <a:buNone/>
             </a:pPr>
             <a:r>
-              <a:rPr lang="en-US" sz="1500" b="1" dirty="0">
-                <a:solidFill>
-                  <a:srgbClr val="8C2A32"/>
-                </a:solidFill>
-                <a:latin typeface="Arial" pitchFamily="34" charset="0"/>
-                <a:ea typeface="Arial" pitchFamily="34" charset="-122"/>
-                <a:cs typeface="Arial" pitchFamily="34" charset="-120"/>
-              </a:rPr>
-              <a:t>2</a:t>
-            </a:r>
-            <a:endParaRPr lang="en-US" sz="1500" dirty="0"/>
-          </a:p>
-        </p:txBody>
-      </p:sp>
-      <p:sp>
-        <p:nvSpPr>
-          <p:cNvPr id="16" name="Text 14"/>
-          <p:cNvSpPr/>
-          <p:nvPr/>
-        </p:nvSpPr>
-        <p:spPr>
-          <a:xfrm>
-            <a:off x="1325880" y="3511296"/>
-            <a:ext cx="9875520" cy="292608"/>
-          </a:xfrm>
-          <a:prstGeom prst="rect">
-            <a:avLst/>
-          </a:prstGeom>
-          <a:noFill/>
-          <a:ln/>
-        </p:spPr>
-        <p:txBody>
-          <a:bodyPr wrap="square" lIns="0" tIns="0" rIns="0" bIns="0" rtlCol="0" anchor="ctr"/>
-          <a:lstStyle/>
-          <a:p>
-            <a:pPr indent="0" marL="0">
-              <a:buNone/>
-            </a:pPr>
-            <a:r>
-              <a:rPr lang="en-US" sz="1450" b="1" dirty="0">
-                <a:solidFill>
-                  <a:srgbClr val="1F2226"/>
-                </a:solidFill>
-                <a:latin typeface="Arial" pitchFamily="34" charset="0"/>
-                <a:ea typeface="Arial" pitchFamily="34" charset="-122"/>
-                <a:cs typeface="Arial" pitchFamily="34" charset="-120"/>
-              </a:rPr>
-              <a:t>불확실성의 출처를 조직 안에서 지목한다</a:t>
-            </a:r>
-            <a:endParaRPr lang="en-US" sz="1450" dirty="0"/>
-          </a:p>
-        </p:txBody>
-      </p:sp>
-      <p:sp>
-        <p:nvSpPr>
-          <p:cNvPr id="17" name="Text 15"/>
-          <p:cNvSpPr/>
-          <p:nvPr/>
-        </p:nvSpPr>
-        <p:spPr>
-          <a:xfrm>
-            <a:off x="1325880" y="3849624"/>
-            <a:ext cx="9875520" cy="420624"/>
+              <a:rPr lang="en-US" sz="1000" dirty="0">
+                <a:solidFill>
+                  <a:srgbClr val="70757C"/>
+                </a:solidFill>
+                <a:latin typeface="Arial" pitchFamily="34" charset="0"/>
+                <a:ea typeface="Arial" pitchFamily="34" charset="-122"/>
+                <a:cs typeface="Arial" pitchFamily="34" charset="-120"/>
+              </a:rPr>
+              <a:t>지금까지</a:t>
+            </a:r>
+            <a:endParaRPr lang="en-US" sz="1000" dirty="0"/>
+          </a:p>
+        </p:txBody>
+      </p:sp>
+      <p:sp>
+        <p:nvSpPr>
+          <p:cNvPr id="26" name="Text 24"/>
+          <p:cNvSpPr/>
+          <p:nvPr/>
+        </p:nvSpPr>
+        <p:spPr>
+          <a:xfrm>
+            <a:off x="2304288" y="3895344"/>
+            <a:ext cx="3611880" cy="475488"/>
           </a:xfrm>
           <a:prstGeom prst="rect">
             <a:avLst/>
@@ -18409,20 +19141,323 @@
           <a:p>
             <a:pPr indent="0" marL="0">
               <a:lnSpc>
-                <a:spcPts val="1600"/>
+                <a:spcPts val="1700"/>
               </a:lnSpc>
               <a:buNone/>
             </a:pPr>
             <a:r>
-              <a:rPr lang="en-US" sz="1150" dirty="0">
-                <a:solidFill>
-                  <a:srgbClr val="70757C"/>
-                </a:solidFill>
-                <a:latin typeface="Arial" pitchFamily="34" charset="0"/>
-                <a:ea typeface="Arial" pitchFamily="34" charset="-122"/>
-                <a:cs typeface="Arial" pitchFamily="34" charset="-120"/>
-              </a:rPr>
-              <a:t>불확실성 관리 이론은 불확실성이 공정성 판단을 흔든다는 것을 보였으나, 그 불확실성이 어디에서 오는지는 관심 밖이었다</a:t>
+              <a:rPr lang="en-US" sz="1250" dirty="0">
+                <a:solidFill>
+                  <a:srgbClr val="1F2226"/>
+                </a:solidFill>
+                <a:latin typeface="Arial" pitchFamily="34" charset="0"/>
+                <a:ea typeface="Arial" pitchFamily="34" charset="-122"/>
+                <a:cs typeface="Arial" pitchFamily="34" charset="-120"/>
+              </a:rPr>
+              <a:t>불확실성은 주어진 조건</a:t>
+            </a:r>
+            <a:endParaRPr lang="en-US" sz="1250" dirty="0"/>
+          </a:p>
+          <a:p>
+            <a:pPr indent="0" marL="0">
+              <a:lnSpc>
+                <a:spcPts val="1700"/>
+              </a:lnSpc>
+              <a:buNone/>
+            </a:pPr>
+            <a:r>
+              <a:rPr lang="en-US" sz="1250" dirty="0">
+                <a:solidFill>
+                  <a:srgbClr val="1F2226"/>
+                </a:solidFill>
+                <a:latin typeface="Arial" pitchFamily="34" charset="0"/>
+                <a:ea typeface="Arial" pitchFamily="34" charset="-122"/>
+                <a:cs typeface="Arial" pitchFamily="34" charset="-120"/>
+              </a:rPr>
+              <a:t>— 실험 조작이거나 외부 상황</a:t>
+            </a:r>
+            <a:endParaRPr lang="en-US" sz="1250" dirty="0"/>
+          </a:p>
+        </p:txBody>
+      </p:sp>
+      <p:sp>
+        <p:nvSpPr>
+          <p:cNvPr id="27" name="Shape 25"/>
+          <p:cNvSpPr/>
+          <p:nvPr/>
+        </p:nvSpPr>
+        <p:spPr>
+          <a:xfrm rot="5400000">
+            <a:off x="6272784" y="3913632"/>
+            <a:ext cx="237744" cy="201168"/>
+          </a:xfrm>
+          <a:prstGeom prst="triangle">
+            <a:avLst/>
+          </a:prstGeom>
+          <a:solidFill>
+            <a:srgbClr val="8C2A32"/>
+          </a:solidFill>
+          <a:ln/>
+        </p:spPr>
+      </p:sp>
+      <p:sp>
+        <p:nvSpPr>
+          <p:cNvPr id="28" name="Shape 26"/>
+          <p:cNvSpPr/>
+          <p:nvPr/>
+        </p:nvSpPr>
+        <p:spPr>
+          <a:xfrm>
+            <a:off x="6720840" y="3584448"/>
+            <a:ext cx="4828032" cy="859536"/>
+          </a:xfrm>
+          <a:prstGeom prst="rect">
+            <a:avLst/>
+          </a:prstGeom>
+          <a:solidFill>
+            <a:srgbClr val="F7EFEF"/>
+          </a:solidFill>
+          <a:ln w="12700">
+            <a:solidFill>
+              <a:srgbClr val="E2D2D1"/>
+            </a:solidFill>
+            <a:prstDash val="solid"/>
+          </a:ln>
+        </p:spPr>
+      </p:sp>
+      <p:sp>
+        <p:nvSpPr>
+          <p:cNvPr id="29" name="Text 27"/>
+          <p:cNvSpPr/>
+          <p:nvPr/>
+        </p:nvSpPr>
+        <p:spPr>
+          <a:xfrm>
+            <a:off x="6922008" y="3675888"/>
+            <a:ext cx="4480560" cy="219456"/>
+          </a:xfrm>
+          <a:prstGeom prst="rect">
+            <a:avLst/>
+          </a:prstGeom>
+          <a:noFill/>
+          <a:ln/>
+        </p:spPr>
+        <p:txBody>
+          <a:bodyPr wrap="square" lIns="0" tIns="0" rIns="0" bIns="0" rtlCol="0" anchor="ctr"/>
+          <a:lstStyle/>
+          <a:p>
+            <a:pPr indent="0" marL="0">
+              <a:buNone/>
+            </a:pPr>
+            <a:r>
+              <a:rPr lang="en-US" sz="1000" b="1" dirty="0">
+                <a:solidFill>
+                  <a:srgbClr val="8C2A32"/>
+                </a:solidFill>
+                <a:latin typeface="Arial" pitchFamily="34" charset="0"/>
+                <a:ea typeface="Arial" pitchFamily="34" charset="-122"/>
+                <a:cs typeface="Arial" pitchFamily="34" charset="-120"/>
+              </a:rPr>
+              <a:t>본 연구</a:t>
+            </a:r>
+            <a:endParaRPr lang="en-US" sz="1000" dirty="0"/>
+          </a:p>
+        </p:txBody>
+      </p:sp>
+      <p:sp>
+        <p:nvSpPr>
+          <p:cNvPr id="30" name="Text 28"/>
+          <p:cNvSpPr/>
+          <p:nvPr/>
+        </p:nvSpPr>
+        <p:spPr>
+          <a:xfrm>
+            <a:off x="6922008" y="3895344"/>
+            <a:ext cx="4462272" cy="475488"/>
+          </a:xfrm>
+          <a:prstGeom prst="rect">
+            <a:avLst/>
+          </a:prstGeom>
+          <a:noFill/>
+          <a:ln/>
+        </p:spPr>
+        <p:txBody>
+          <a:bodyPr wrap="square" lIns="0" tIns="0" rIns="0" bIns="0" rtlCol="0" anchor="ctr"/>
+          <a:lstStyle/>
+          <a:p>
+            <a:pPr indent="0" marL="0">
+              <a:lnSpc>
+                <a:spcPts val="1700"/>
+              </a:lnSpc>
+              <a:buNone/>
+            </a:pPr>
+            <a:r>
+              <a:rPr lang="en-US" sz="1250" b="1" dirty="0">
+                <a:solidFill>
+                  <a:srgbClr val="1F2226"/>
+                </a:solidFill>
+                <a:latin typeface="Arial" pitchFamily="34" charset="0"/>
+                <a:ea typeface="Arial" pitchFamily="34" charset="-122"/>
+                <a:cs typeface="Arial" pitchFamily="34" charset="-120"/>
+              </a:rPr>
+              <a:t>불확실성은 업무의 성격이 만든 결과</a:t>
+            </a:r>
+            <a:endParaRPr lang="en-US" sz="1250" dirty="0"/>
+          </a:p>
+          <a:p>
+            <a:pPr indent="0" marL="0">
+              <a:lnSpc>
+                <a:spcPts val="1700"/>
+              </a:lnSpc>
+              <a:buNone/>
+            </a:pPr>
+            <a:r>
+              <a:rPr lang="en-US" sz="1250" b="1" dirty="0">
+                <a:solidFill>
+                  <a:srgbClr val="1F2226"/>
+                </a:solidFill>
+                <a:latin typeface="Arial" pitchFamily="34" charset="0"/>
+                <a:ea typeface="Arial" pitchFamily="34" charset="-122"/>
+                <a:cs typeface="Arial" pitchFamily="34" charset="-120"/>
+              </a:rPr>
+              <a:t>— 조직 안에서 발생한다</a:t>
+            </a:r>
+            <a:endParaRPr lang="en-US" sz="1250" dirty="0"/>
+          </a:p>
+        </p:txBody>
+      </p:sp>
+      <p:sp>
+        <p:nvSpPr>
+          <p:cNvPr id="31" name="Text 29"/>
+          <p:cNvSpPr/>
+          <p:nvPr/>
+        </p:nvSpPr>
+        <p:spPr>
+          <a:xfrm>
+            <a:off x="2103120" y="4498848"/>
+            <a:ext cx="9418320" cy="256032"/>
+          </a:xfrm>
+          <a:prstGeom prst="rect">
+            <a:avLst/>
+          </a:prstGeom>
+          <a:noFill/>
+          <a:ln/>
+        </p:spPr>
+        <p:txBody>
+          <a:bodyPr wrap="square" lIns="0" tIns="0" rIns="0" bIns="0" rtlCol="0" anchor="ctr"/>
+          <a:lstStyle/>
+          <a:p>
+            <a:pPr indent="0" marL="0">
+              <a:buNone/>
+            </a:pPr>
+            <a:r>
+              <a:rPr lang="en-US" sz="1200" b="1" dirty="0">
+                <a:solidFill>
+                  <a:srgbClr val="6B1F26"/>
+                </a:solidFill>
+                <a:latin typeface="Arial" pitchFamily="34" charset="0"/>
+                <a:ea typeface="Arial" pitchFamily="34" charset="-122"/>
+                <a:cs typeface="Arial" pitchFamily="34" charset="-120"/>
+              </a:rPr>
+              <a:t>→   AI 협업의 귀속 모호성을 불확실성의 출처로 지목한다</a:t>
+            </a:r>
+            <a:endParaRPr lang="en-US" sz="1200" dirty="0"/>
+          </a:p>
+        </p:txBody>
+      </p:sp>
+      <p:sp>
+        <p:nvSpPr>
+          <p:cNvPr id="32" name="Shape 30"/>
+          <p:cNvSpPr/>
+          <p:nvPr/>
+        </p:nvSpPr>
+        <p:spPr>
+          <a:xfrm>
+            <a:off x="658368" y="5065776"/>
+            <a:ext cx="329184" cy="329184"/>
+          </a:xfrm>
+          <a:prstGeom prst="ellipse">
+            <a:avLst/>
+          </a:prstGeom>
+          <a:solidFill>
+            <a:srgbClr val="8C2A32"/>
+          </a:solidFill>
+          <a:ln/>
+        </p:spPr>
+      </p:sp>
+      <p:sp>
+        <p:nvSpPr>
+          <p:cNvPr id="33" name="Text 31"/>
+          <p:cNvSpPr/>
+          <p:nvPr/>
+        </p:nvSpPr>
+        <p:spPr>
+          <a:xfrm>
+            <a:off x="658368" y="5065776"/>
+            <a:ext cx="329184" cy="329184"/>
+          </a:xfrm>
+          <a:prstGeom prst="rect">
+            <a:avLst/>
+          </a:prstGeom>
+          <a:noFill/>
+          <a:ln/>
+        </p:spPr>
+        <p:txBody>
+          <a:bodyPr wrap="square" lIns="0" tIns="0" rIns="0" bIns="0" rtlCol="0" anchor="ctr"/>
+          <a:lstStyle/>
+          <a:p>
+            <a:pPr algn="ctr" indent="0" marL="0">
+              <a:buNone/>
+            </a:pPr>
+            <a:r>
+              <a:rPr lang="en-US" sz="1300" b="1" dirty="0">
+                <a:solidFill>
+                  <a:srgbClr val="FFFFFF"/>
+                </a:solidFill>
+                <a:latin typeface="Arial" pitchFamily="34" charset="0"/>
+                <a:ea typeface="Arial" pitchFamily="34" charset="-122"/>
+                <a:cs typeface="Arial" pitchFamily="34" charset="-120"/>
+              </a:rPr>
+              <a:t>3</a:t>
+            </a:r>
+            <a:endParaRPr lang="en-US" sz="1300" dirty="0"/>
+          </a:p>
+        </p:txBody>
+      </p:sp>
+      <p:sp>
+        <p:nvSpPr>
+          <p:cNvPr id="34" name="Text 32"/>
+          <p:cNvSpPr/>
+          <p:nvPr/>
+        </p:nvSpPr>
+        <p:spPr>
+          <a:xfrm>
+            <a:off x="640080" y="5449824"/>
+            <a:ext cx="1371600" cy="256032"/>
+          </a:xfrm>
+          <a:prstGeom prst="rect">
+            <a:avLst/>
+          </a:prstGeom>
+          <a:noFill/>
+          <a:ln/>
+        </p:spPr>
+        <p:txBody>
+          <a:bodyPr wrap="square" lIns="0" tIns="0" rIns="0" bIns="0" rtlCol="0" anchor="ctr"/>
+          <a:lstStyle/>
+          <a:p>
+            <a:pPr algn="ctr" indent="0" marL="0">
+              <a:buNone/>
+            </a:pPr>
+            <a:r>
+              <a:rPr lang="en-US" sz="1150" b="1" dirty="0">
+                <a:solidFill>
+                  <a:srgbClr val="8C2A32"/>
+                </a:solidFill>
+                <a:latin typeface="Arial" pitchFamily="34" charset="0"/>
+                <a:ea typeface="Arial" pitchFamily="34" charset="-122"/>
+                <a:cs typeface="Arial" pitchFamily="34" charset="-120"/>
+              </a:rPr>
+              <a:t>처방의 검증</a:t>
             </a:r>
             <a:endParaRPr lang="en-US" sz="1150" dirty="0"/>
           </a:p>
@@ -18430,53 +19465,14 @@
       </p:sp>
       <p:sp>
         <p:nvSpPr>
-          <p:cNvPr id="18" name="Text 16"/>
-          <p:cNvSpPr/>
-          <p:nvPr/>
-        </p:nvSpPr>
-        <p:spPr>
-          <a:xfrm>
-            <a:off x="1325880" y="4306824"/>
-            <a:ext cx="9875520" cy="292608"/>
-          </a:xfrm>
-          <a:prstGeom prst="rect">
-            <a:avLst/>
-          </a:prstGeom>
-          <a:noFill/>
-          <a:ln/>
-        </p:spPr>
-        <p:txBody>
-          <a:bodyPr wrap="square" lIns="0" tIns="0" rIns="0" bIns="0" rtlCol="0" anchor="ctr"/>
-          <a:lstStyle/>
-          <a:p>
-            <a:pPr indent="0" marL="0">
-              <a:buNone/>
-            </a:pPr>
-            <a:r>
-              <a:rPr lang="en-US" sz="1250" b="1" dirty="0">
-                <a:solidFill>
-                  <a:srgbClr val="6B1F26"/>
-                </a:solidFill>
-                <a:latin typeface="Arial" pitchFamily="34" charset="0"/>
-                <a:ea typeface="Arial" pitchFamily="34" charset="-122"/>
-                <a:cs typeface="Arial" pitchFamily="34" charset="-120"/>
-              </a:rPr>
-              <a:t>→  AI 협업에서 발생하는 귀속 모호성을 그 출처의 하나로 제시한다</a:t>
-            </a:r>
-            <a:endParaRPr lang="en-US" sz="1250" dirty="0"/>
-          </a:p>
-        </p:txBody>
-      </p:sp>
-      <p:sp>
-        <p:nvSpPr>
-          <p:cNvPr id="19" name="Shape 17"/>
-          <p:cNvSpPr/>
-          <p:nvPr/>
-        </p:nvSpPr>
-        <p:spPr>
-          <a:xfrm>
-            <a:off x="640080" y="4773168"/>
-            <a:ext cx="10927080" cy="1298448"/>
+          <p:cNvPr id="35" name="Shape 33"/>
+          <p:cNvSpPr/>
+          <p:nvPr/>
+        </p:nvSpPr>
+        <p:spPr>
+          <a:xfrm>
+            <a:off x="2103120" y="4937760"/>
+            <a:ext cx="3977640" cy="859536"/>
           </a:xfrm>
           <a:prstGeom prst="rect">
             <a:avLst/>
@@ -18494,14 +19490,14 @@
       </p:sp>
       <p:sp>
         <p:nvSpPr>
-          <p:cNvPr id="20" name="Text 18"/>
-          <p:cNvSpPr/>
-          <p:nvPr/>
-        </p:nvSpPr>
-        <p:spPr>
-          <a:xfrm>
-            <a:off x="914400" y="4919472"/>
-            <a:ext cx="365760" cy="292608"/>
+          <p:cNvPr id="36" name="Text 34"/>
+          <p:cNvSpPr/>
+          <p:nvPr/>
+        </p:nvSpPr>
+        <p:spPr>
+          <a:xfrm>
+            <a:off x="2304288" y="5029200"/>
+            <a:ext cx="3566160" cy="219456"/>
           </a:xfrm>
           <a:prstGeom prst="rect">
             <a:avLst/>
@@ -18517,69 +19513,30 @@
               <a:buNone/>
             </a:pPr>
             <a:r>
-              <a:rPr lang="en-US" sz="1500" b="1" dirty="0">
-                <a:solidFill>
-                  <a:srgbClr val="8C2A32"/>
-                </a:solidFill>
-                <a:latin typeface="Arial" pitchFamily="34" charset="0"/>
-                <a:ea typeface="Arial" pitchFamily="34" charset="-122"/>
-                <a:cs typeface="Arial" pitchFamily="34" charset="-120"/>
-              </a:rPr>
-              <a:t>3</a:t>
-            </a:r>
-            <a:endParaRPr lang="en-US" sz="1500" dirty="0"/>
-          </a:p>
-        </p:txBody>
-      </p:sp>
-      <p:sp>
-        <p:nvSpPr>
-          <p:cNvPr id="21" name="Text 19"/>
-          <p:cNvSpPr/>
-          <p:nvPr/>
-        </p:nvSpPr>
-        <p:spPr>
-          <a:xfrm>
-            <a:off x="1325880" y="4910328"/>
-            <a:ext cx="9875520" cy="292608"/>
-          </a:xfrm>
-          <a:prstGeom prst="rect">
-            <a:avLst/>
-          </a:prstGeom>
-          <a:noFill/>
-          <a:ln/>
-        </p:spPr>
-        <p:txBody>
-          <a:bodyPr wrap="square" lIns="0" tIns="0" rIns="0" bIns="0" rtlCol="0" anchor="ctr"/>
-          <a:lstStyle/>
-          <a:p>
-            <a:pPr indent="0" marL="0">
-              <a:buNone/>
-            </a:pPr>
-            <a:r>
-              <a:rPr lang="en-US" sz="1450" b="1" dirty="0">
-                <a:solidFill>
-                  <a:srgbClr val="1F2226"/>
-                </a:solidFill>
-                <a:latin typeface="Arial" pitchFamily="34" charset="0"/>
-                <a:ea typeface="Arial" pitchFamily="34" charset="-122"/>
-                <a:cs typeface="Arial" pitchFamily="34" charset="-120"/>
-              </a:rPr>
-              <a:t>절차 명확화의 완화 범위를 검증한다</a:t>
-            </a:r>
-            <a:endParaRPr lang="en-US" sz="1450" dirty="0"/>
-          </a:p>
-        </p:txBody>
-      </p:sp>
-      <p:sp>
-        <p:nvSpPr>
-          <p:cNvPr id="22" name="Text 20"/>
-          <p:cNvSpPr/>
-          <p:nvPr/>
-        </p:nvSpPr>
-        <p:spPr>
-          <a:xfrm>
-            <a:off x="1325880" y="5248656"/>
-            <a:ext cx="9875520" cy="420624"/>
+              <a:rPr lang="en-US" sz="1000" dirty="0">
+                <a:solidFill>
+                  <a:srgbClr val="70757C"/>
+                </a:solidFill>
+                <a:latin typeface="Arial" pitchFamily="34" charset="0"/>
+                <a:ea typeface="Arial" pitchFamily="34" charset="-122"/>
+                <a:cs typeface="Arial" pitchFamily="34" charset="-120"/>
+              </a:rPr>
+              <a:t>지금까지</a:t>
+            </a:r>
+            <a:endParaRPr lang="en-US" sz="1000" dirty="0"/>
+          </a:p>
+        </p:txBody>
+      </p:sp>
+      <p:sp>
+        <p:nvSpPr>
+          <p:cNvPr id="37" name="Text 35"/>
+          <p:cNvSpPr/>
+          <p:nvPr/>
+        </p:nvSpPr>
+        <p:spPr>
+          <a:xfrm>
+            <a:off x="2304288" y="5248656"/>
+            <a:ext cx="3611880" cy="475488"/>
           </a:xfrm>
           <a:prstGeom prst="rect">
             <a:avLst/>
@@ -18593,35 +19550,100 @@
           <a:p>
             <a:pPr indent="0" marL="0">
               <a:lnSpc>
-                <a:spcPts val="1600"/>
+                <a:spcPts val="1700"/>
               </a:lnSpc>
               <a:buNone/>
             </a:pPr>
             <a:r>
-              <a:rPr lang="en-US" sz="1150" dirty="0">
-                <a:solidFill>
-                  <a:srgbClr val="70757C"/>
-                </a:solidFill>
-                <a:latin typeface="Arial" pitchFamily="34" charset="0"/>
-                <a:ea typeface="Arial" pitchFamily="34" charset="-122"/>
-                <a:cs typeface="Arial" pitchFamily="34" charset="-120"/>
-              </a:rPr>
-              <a:t>「기준을 명확히 하면 된다」는 통상적 처방이 이 문제에 어디까지 유효한지는 검증된 바 없다</a:t>
-            </a:r>
-            <a:endParaRPr lang="en-US" sz="1150" dirty="0"/>
-          </a:p>
-        </p:txBody>
-      </p:sp>
-      <p:sp>
-        <p:nvSpPr>
-          <p:cNvPr id="23" name="Text 21"/>
-          <p:cNvSpPr/>
-          <p:nvPr/>
-        </p:nvSpPr>
-        <p:spPr>
-          <a:xfrm>
-            <a:off x="1325880" y="5705856"/>
-            <a:ext cx="9875520" cy="292608"/>
+              <a:rPr lang="en-US" sz="1250" dirty="0">
+                <a:solidFill>
+                  <a:srgbClr val="1F2226"/>
+                </a:solidFill>
+                <a:latin typeface="Arial" pitchFamily="34" charset="0"/>
+                <a:ea typeface="Arial" pitchFamily="34" charset="-122"/>
+                <a:cs typeface="Arial" pitchFamily="34" charset="-120"/>
+              </a:rPr>
+              <a:t>「기준을 명확히 하면 된다」</a:t>
+            </a:r>
+            <a:endParaRPr lang="en-US" sz="1250" dirty="0"/>
+          </a:p>
+          <a:p>
+            <a:pPr indent="0" marL="0">
+              <a:lnSpc>
+                <a:spcPts val="1700"/>
+              </a:lnSpc>
+              <a:buNone/>
+            </a:pPr>
+            <a:r>
+              <a:rPr lang="en-US" sz="1250" dirty="0">
+                <a:solidFill>
+                  <a:srgbClr val="1F2226"/>
+                </a:solidFill>
+                <a:latin typeface="Arial" pitchFamily="34" charset="0"/>
+                <a:ea typeface="Arial" pitchFamily="34" charset="-122"/>
+                <a:cs typeface="Arial" pitchFamily="34" charset="-120"/>
+              </a:rPr>
+              <a:t>— 통상적 처방</a:t>
+            </a:r>
+            <a:endParaRPr lang="en-US" sz="1250" dirty="0"/>
+          </a:p>
+        </p:txBody>
+      </p:sp>
+      <p:sp>
+        <p:nvSpPr>
+          <p:cNvPr id="38" name="Shape 36"/>
+          <p:cNvSpPr/>
+          <p:nvPr/>
+        </p:nvSpPr>
+        <p:spPr>
+          <a:xfrm rot="5400000">
+            <a:off x="6272784" y="5266944"/>
+            <a:ext cx="237744" cy="201168"/>
+          </a:xfrm>
+          <a:prstGeom prst="triangle">
+            <a:avLst/>
+          </a:prstGeom>
+          <a:solidFill>
+            <a:srgbClr val="8C2A32"/>
+          </a:solidFill>
+          <a:ln/>
+        </p:spPr>
+      </p:sp>
+      <p:sp>
+        <p:nvSpPr>
+          <p:cNvPr id="39" name="Shape 37"/>
+          <p:cNvSpPr/>
+          <p:nvPr/>
+        </p:nvSpPr>
+        <p:spPr>
+          <a:xfrm>
+            <a:off x="6720840" y="4937760"/>
+            <a:ext cx="4828032" cy="859536"/>
+          </a:xfrm>
+          <a:prstGeom prst="rect">
+            <a:avLst/>
+          </a:prstGeom>
+          <a:solidFill>
+            <a:srgbClr val="F7EFEF"/>
+          </a:solidFill>
+          <a:ln w="12700">
+            <a:solidFill>
+              <a:srgbClr val="E2D2D1"/>
+            </a:solidFill>
+            <a:prstDash val="solid"/>
+          </a:ln>
+        </p:spPr>
+      </p:sp>
+      <p:sp>
+        <p:nvSpPr>
+          <p:cNvPr id="40" name="Text 38"/>
+          <p:cNvSpPr/>
+          <p:nvPr/>
+        </p:nvSpPr>
+        <p:spPr>
+          <a:xfrm>
+            <a:off x="6922008" y="5029200"/>
+            <a:ext cx="4480560" cy="219456"/>
           </a:xfrm>
           <a:prstGeom prst="rect">
             <a:avLst/>
@@ -18637,23 +19659,124 @@
               <a:buNone/>
             </a:pPr>
             <a:r>
+              <a:rPr lang="en-US" sz="1000" b="1" dirty="0">
+                <a:solidFill>
+                  <a:srgbClr val="8C2A32"/>
+                </a:solidFill>
+                <a:latin typeface="Arial" pitchFamily="34" charset="0"/>
+                <a:ea typeface="Arial" pitchFamily="34" charset="-122"/>
+                <a:cs typeface="Arial" pitchFamily="34" charset="-120"/>
+              </a:rPr>
+              <a:t>본 연구</a:t>
+            </a:r>
+            <a:endParaRPr lang="en-US" sz="1000" dirty="0"/>
+          </a:p>
+        </p:txBody>
+      </p:sp>
+      <p:sp>
+        <p:nvSpPr>
+          <p:cNvPr id="41" name="Text 39"/>
+          <p:cNvSpPr/>
+          <p:nvPr/>
+        </p:nvSpPr>
+        <p:spPr>
+          <a:xfrm>
+            <a:off x="6922008" y="5248656"/>
+            <a:ext cx="4462272" cy="475488"/>
+          </a:xfrm>
+          <a:prstGeom prst="rect">
+            <a:avLst/>
+          </a:prstGeom>
+          <a:noFill/>
+          <a:ln/>
+        </p:spPr>
+        <p:txBody>
+          <a:bodyPr wrap="square" lIns="0" tIns="0" rIns="0" bIns="0" rtlCol="0" anchor="ctr"/>
+          <a:lstStyle/>
+          <a:p>
+            <a:pPr indent="0" marL="0">
+              <a:lnSpc>
+                <a:spcPts val="1700"/>
+              </a:lnSpc>
+              <a:buNone/>
+            </a:pPr>
+            <a:r>
               <a:rPr lang="en-US" sz="1250" b="1" dirty="0">
                 <a:solidFill>
+                  <a:srgbClr val="1F2226"/>
+                </a:solidFill>
+                <a:latin typeface="Arial" pitchFamily="34" charset="0"/>
+                <a:ea typeface="Arial" pitchFamily="34" charset="-122"/>
+                <a:cs typeface="Arial" pitchFamily="34" charset="-120"/>
+              </a:rPr>
+              <a:t>명확히 해도 남는 부분이 있는가</a:t>
+            </a:r>
+            <a:endParaRPr lang="en-US" sz="1250" dirty="0"/>
+          </a:p>
+          <a:p>
+            <a:pPr indent="0" marL="0">
+              <a:lnSpc>
+                <a:spcPts val="1700"/>
+              </a:lnSpc>
+              <a:buNone/>
+            </a:pPr>
+            <a:r>
+              <a:rPr lang="en-US" sz="1250" b="1" dirty="0">
+                <a:solidFill>
+                  <a:srgbClr val="1F2226"/>
+                </a:solidFill>
+                <a:latin typeface="Arial" pitchFamily="34" charset="0"/>
+                <a:ea typeface="Arial" pitchFamily="34" charset="-122"/>
+                <a:cs typeface="Arial" pitchFamily="34" charset="-120"/>
+              </a:rPr>
+              <a:t>— 처방의 유효 범위</a:t>
+            </a:r>
+            <a:endParaRPr lang="en-US" sz="1250" dirty="0"/>
+          </a:p>
+        </p:txBody>
+      </p:sp>
+      <p:sp>
+        <p:nvSpPr>
+          <p:cNvPr id="42" name="Text 40"/>
+          <p:cNvSpPr/>
+          <p:nvPr/>
+        </p:nvSpPr>
+        <p:spPr>
+          <a:xfrm>
+            <a:off x="2103120" y="5852160"/>
+            <a:ext cx="9418320" cy="256032"/>
+          </a:xfrm>
+          <a:prstGeom prst="rect">
+            <a:avLst/>
+          </a:prstGeom>
+          <a:noFill/>
+          <a:ln/>
+        </p:spPr>
+        <p:txBody>
+          <a:bodyPr wrap="square" lIns="0" tIns="0" rIns="0" bIns="0" rtlCol="0" anchor="ctr"/>
+          <a:lstStyle/>
+          <a:p>
+            <a:pPr indent="0" marL="0">
+              <a:buNone/>
+            </a:pPr>
+            <a:r>
+              <a:rPr lang="en-US" sz="1200" b="1" dirty="0">
+                <a:solidFill>
                   <a:srgbClr val="6B1F26"/>
                 </a:solidFill>
                 <a:latin typeface="Arial" pitchFamily="34" charset="0"/>
                 <a:ea typeface="Arial" pitchFamily="34" charset="-122"/>
                 <a:cs typeface="Arial" pitchFamily="34" charset="-120"/>
               </a:rPr>
-              <a:t>→  완화되더라도 남는 부분이 있는지를 조절효과로 확인한다</a:t>
-            </a:r>
-            <a:endParaRPr lang="en-US" sz="1250" dirty="0"/>
-          </a:p>
-        </p:txBody>
-      </p:sp>
-      <p:sp>
-        <p:nvSpPr>
-          <p:cNvPr id="24" name="Text 22"/>
+              <a:t>→   절차 명확화가 어디까지 완화하는지를 조절효과로 확인한다</a:t>
+            </a:r>
+            <a:endParaRPr lang="en-US" sz="1200" dirty="0"/>
+          </a:p>
+        </p:txBody>
+      </p:sp>
+      <p:sp>
+        <p:nvSpPr>
+          <p:cNvPr id="43" name="Text 41"/>
           <p:cNvSpPr/>
           <p:nvPr/>
         </p:nvSpPr>
@@ -19545,8 +20668,8 @@
         </p:nvSpPr>
         <p:spPr>
           <a:xfrm>
-            <a:off x="4846320" y="2871216"/>
-            <a:ext cx="2286000" cy="365760"/>
+            <a:off x="2331720" y="2834640"/>
+            <a:ext cx="2286000" cy="402336"/>
           </a:xfrm>
           <a:prstGeom prst="rect">
             <a:avLst/>
@@ -19556,9 +20679,9 @@
           </a:solidFill>
           <a:ln w="15875">
             <a:solidFill>
-              <a:srgbClr val="70757C"/>
+              <a:srgbClr val="8C2A32"/>
             </a:solidFill>
-            <a:prstDash val="dash"/>
+            <a:prstDash val="solid"/>
           </a:ln>
         </p:spPr>
       </p:sp>
@@ -19570,8 +20693,8 @@
         </p:nvSpPr>
         <p:spPr>
           <a:xfrm>
-            <a:off x="4846320" y="2871216"/>
-            <a:ext cx="2286000" cy="365760"/>
+            <a:off x="2331720" y="2834640"/>
+            <a:ext cx="2286000" cy="402336"/>
           </a:xfrm>
           <a:prstGeom prst="rect">
             <a:avLst/>
@@ -19589,7 +20712,7 @@
             <a:r>
               <a:rPr lang="en-US" sz="1050" b="1" dirty="0">
                 <a:solidFill>
-                  <a:srgbClr val="70757C"/>
+                  <a:srgbClr val="8C2A32"/>
                 </a:solidFill>
                 <a:latin typeface="Arial" pitchFamily="34" charset="0"/>
                 <a:ea typeface="Arial" pitchFamily="34" charset="-122"/>
@@ -19609,45 +20732,60 @@
         </p:nvSpPr>
         <p:spPr>
           <a:xfrm>
-            <a:off x="5193792" y="3236976"/>
-            <a:ext cx="-1005840" cy="384048"/>
+            <a:off x="3474720" y="3236976"/>
+            <a:ext cx="256032" cy="640080"/>
           </a:xfrm>
           <a:prstGeom prst="line">
             <a:avLst/>
           </a:prstGeom>
           <a:noFill/>
-          <a:ln w="15875">
+          <a:ln w="19050">
             <a:solidFill>
-              <a:srgbClr val="70757C"/>
+              <a:srgbClr val="8C2A32"/>
             </a:solidFill>
-            <a:prstDash val="dash"/>
+            <a:prstDash val="solid"/>
             <a:tailEnd type="triangle"/>
           </a:ln>
         </p:spPr>
       </p:sp>
       <p:sp>
         <p:nvSpPr>
-          <p:cNvPr id="28" name="Shape 26"/>
-          <p:cNvSpPr/>
-          <p:nvPr/>
-        </p:nvSpPr>
-        <p:spPr>
-          <a:xfrm>
-            <a:off x="6784848" y="3236976"/>
-            <a:ext cx="1005840" cy="384048"/>
-          </a:xfrm>
-          <a:prstGeom prst="line">
-            <a:avLst/>
-          </a:prstGeom>
-          <a:noFill/>
-          <a:ln w="15875">
-            <a:solidFill>
-              <a:srgbClr val="70757C"/>
-            </a:solidFill>
-            <a:prstDash val="dash"/>
-            <a:tailEnd type="triangle"/>
-          </a:ln>
-        </p:spPr>
+          <p:cNvPr id="28" name="Text 26"/>
+          <p:cNvSpPr/>
+          <p:nvPr/>
+        </p:nvSpPr>
+        <p:spPr>
+          <a:xfrm>
+            <a:off x="2907792" y="3401568"/>
+            <a:ext cx="502920" cy="237744"/>
+          </a:xfrm>
+          <a:prstGeom prst="rect">
+            <a:avLst/>
+          </a:prstGeom>
+          <a:noFill/>
+          <a:ln/>
+        </p:spPr>
+        <p:txBody>
+          <a:bodyPr wrap="square" lIns="0" tIns="0" rIns="0" bIns="0" rtlCol="0" anchor="ctr"/>
+          <a:lstStyle/>
+          <a:p>
+            <a:pPr indent="0" marL="0">
+              <a:buNone/>
+            </a:pPr>
+            <a:r>
+              <a:rPr lang="en-US" sz="1150" b="1" dirty="0">
+                <a:solidFill>
+                  <a:srgbClr val="8C2A32"/>
+                </a:solidFill>
+                <a:latin typeface="Arial" pitchFamily="34" charset="0"/>
+                <a:ea typeface="Arial" pitchFamily="34" charset="-122"/>
+                <a:cs typeface="Arial" pitchFamily="34" charset="-120"/>
+              </a:rPr>
+              <a:t>H4</a:t>
+            </a:r>
+            <a:endParaRPr lang="en-US" sz="1150" dirty="0"/>
+          </a:p>
+        </p:txBody>
       </p:sp>
       <p:sp>
         <p:nvSpPr>
@@ -19657,8 +20795,8 @@
         </p:nvSpPr>
         <p:spPr>
           <a:xfrm>
-            <a:off x="3063240" y="2944368"/>
-            <a:ext cx="1234440" cy="219456"/>
+            <a:off x="4709160" y="2889504"/>
+            <a:ext cx="1828800" cy="219456"/>
           </a:xfrm>
           <a:prstGeom prst="rect">
             <a:avLst/>
@@ -19670,7 +20808,7 @@
           <a:bodyPr wrap="square" lIns="0" tIns="0" rIns="0" bIns="0" rtlCol="0" anchor="ctr"/>
           <a:lstStyle/>
           <a:p>
-            <a:pPr algn="ctr" indent="0" marL="0">
+            <a:pPr indent="0" marL="0">
               <a:buNone/>
             </a:pPr>
             <a:r>
@@ -19682,7 +20820,7 @@
                 <a:ea typeface="Arial" pitchFamily="34" charset="-122"/>
                 <a:cs typeface="Arial" pitchFamily="34" charset="-120"/>
               </a:rPr>
-              <a:t>(a안) Model 7</a:t>
+              <a:t>PROCESS Model 7</a:t>
             </a:r>
             <a:endParaRPr lang="en-US" sz="950" dirty="0"/>
           </a:p>
@@ -19690,46 +20828,7 @@
       </p:sp>
       <p:sp>
         <p:nvSpPr>
-          <p:cNvPr id="30" name="Text 28"/>
-          <p:cNvSpPr/>
-          <p:nvPr/>
-        </p:nvSpPr>
-        <p:spPr>
-          <a:xfrm>
-            <a:off x="7680960" y="2944368"/>
-            <a:ext cx="1280160" cy="219456"/>
-          </a:xfrm>
-          <a:prstGeom prst="rect">
-            <a:avLst/>
-          </a:prstGeom>
-          <a:noFill/>
-          <a:ln/>
-        </p:spPr>
-        <p:txBody>
-          <a:bodyPr wrap="square" lIns="0" tIns="0" rIns="0" bIns="0" rtlCol="0" anchor="ctr"/>
-          <a:lstStyle/>
-          <a:p>
-            <a:pPr algn="ctr" indent="0" marL="0">
-              <a:buNone/>
-            </a:pPr>
-            <a:r>
-              <a:rPr lang="en-US" sz="950" dirty="0">
-                <a:solidFill>
-                  <a:srgbClr val="70757C"/>
-                </a:solidFill>
-                <a:latin typeface="Arial" pitchFamily="34" charset="0"/>
-                <a:ea typeface="Arial" pitchFamily="34" charset="-122"/>
-                <a:cs typeface="Arial" pitchFamily="34" charset="-120"/>
-              </a:rPr>
-              <a:t>(b안) Model 14</a:t>
-            </a:r>
-            <a:endParaRPr lang="en-US" sz="950" dirty="0"/>
-          </a:p>
-        </p:txBody>
-      </p:sp>
-      <p:sp>
-        <p:nvSpPr>
-          <p:cNvPr id="31" name="Shape 29"/>
+          <p:cNvPr id="30" name="Shape 28"/>
           <p:cNvSpPr/>
           <p:nvPr/>
         </p:nvSpPr>
@@ -19752,7 +20851,7 @@
       </p:sp>
       <p:sp>
         <p:nvSpPr>
-          <p:cNvPr id="32" name="Text 30"/>
+          <p:cNvPr id="31" name="Text 29"/>
           <p:cNvSpPr/>
           <p:nvPr/>
         </p:nvSpPr>
@@ -19791,7 +20890,7 @@
       </p:sp>
       <p:sp>
         <p:nvSpPr>
-          <p:cNvPr id="33" name="Text 31"/>
+          <p:cNvPr id="32" name="Text 30"/>
           <p:cNvSpPr/>
           <p:nvPr/>
         </p:nvSpPr>
@@ -19843,7 +20942,7 @@
           </p:nvPr>
         </p:nvGraphicFramePr>
         <p:xfrm>
-          <a:off x="640080" y="5321808"/>
+          <a:off x="640080" y="5266944"/>
           <a:ext cx="10927080" cy="914400"/>
         </p:xfrm>
         <a:graphic>
@@ -19855,7 +20954,7 @@
                 <a:gridCol w="6355080"/>
                 <a:gridCol w="3913632"/>
               </a:tblGrid>
-              <a:tr h="256032">
+              <a:tr h="246888">
                 <a:tc>
                   <a:txBody>
                     <a:bodyPr/>
@@ -20061,7 +21160,7 @@
                   </a:tcPr>
                 </a:tc>
               </a:tr>
-              <a:tr h="256032">
+              <a:tr h="246888">
                 <a:tc>
                   <a:txBody>
                     <a:bodyPr/>
@@ -20267,7 +21366,7 @@
                   </a:tcPr>
                 </a:tc>
               </a:tr>
-              <a:tr h="256032">
+              <a:tr h="246888">
                 <a:tc>
                   <a:txBody>
                     <a:bodyPr/>
@@ -20473,7 +21572,7 @@
                   </a:tcPr>
                 </a:tc>
               </a:tr>
-              <a:tr h="256032">
+              <a:tr h="246888">
                 <a:tc>
                   <a:txBody>
                     <a:bodyPr/>
@@ -20559,7 +21658,7 @@
                           <a:ea typeface="Arial" pitchFamily="34" charset="-122"/>
                           <a:cs typeface="Arial" pitchFamily="34" charset="-120"/>
                         </a:rPr>
-                        <a:t>평가 절차 명확성이 그 경로를 조절할 것이다</a:t>
+                        <a:t>평가 절차 명확성이 높을수록 귀속 모호성이 평가 불확실성을 높이는 관계가 완화될 것이다</a:t>
                       </a:r>
                       <a:endParaRPr lang="en-US" sz="1200" dirty="0">
                         <a:latin typeface="Arial" charset="0"/>
@@ -20619,15 +21718,15 @@
                         <a:buNone/>
                       </a:pPr>
                       <a:r>
-                        <a:rPr lang="en-US" sz="1200" i="1" dirty="0">
+                        <a:rPr lang="en-US" sz="1200" dirty="0">
                           <a:solidFill>
-                            <a:srgbClr val="70757C"/>
+                            <a:srgbClr val="1F2226"/>
                           </a:solidFill>
                           <a:latin typeface="Arial" pitchFamily="34" charset="0"/>
                           <a:ea typeface="Arial" pitchFamily="34" charset="-122"/>
                           <a:cs typeface="Arial" pitchFamily="34" charset="-120"/>
                         </a:rPr>
-                        <a:t>조절 위치 검토 중 — 사전 검정력으로 확정</a:t>
+                        <a:t>완화 근거 — Erdogan(2002) 등  ·  Model 7</a:t>
                       </a:r>
                       <a:endParaRPr lang="en-US" sz="1200" dirty="0">
                         <a:latin typeface="Arial" charset="0"/>
@@ -20683,6 +21782,45 @@
           </a:graphicData>
         </a:graphic>
       </p:graphicFrame>
+      <p:sp>
+        <p:nvSpPr>
+          <p:cNvPr id="34" name="Text 31"/>
+          <p:cNvSpPr/>
+          <p:nvPr/>
+        </p:nvSpPr>
+        <p:spPr>
+          <a:xfrm>
+            <a:off x="640080" y="6327648"/>
+            <a:ext cx="9601200" cy="237744"/>
+          </a:xfrm>
+          <a:prstGeom prst="rect">
+            <a:avLst/>
+          </a:prstGeom>
+          <a:noFill/>
+          <a:ln/>
+        </p:spPr>
+        <p:txBody>
+          <a:bodyPr wrap="square" lIns="0" tIns="0" rIns="0" bIns="0" rtlCol="0" anchor="ctr"/>
+          <a:lstStyle/>
+          <a:p>
+            <a:pPr indent="0" marL="0">
+              <a:buNone/>
+            </a:pPr>
+            <a:r>
+              <a:rPr lang="en-US" sz="1050" dirty="0">
+                <a:solidFill>
+                  <a:srgbClr val="70757C"/>
+                </a:solidFill>
+                <a:latin typeface="Arial" pitchFamily="34" charset="0"/>
+                <a:ea typeface="Arial" pitchFamily="34" charset="-122"/>
+                <a:cs typeface="Arial" pitchFamily="34" charset="-120"/>
+              </a:rPr>
+              <a:t>조절변수를 측정으로 둘 것인가 시나리오에서 조작할 것인가는 사전 검정력 분석 결과에 따라 조정할 계획이다</a:t>
+            </a:r>
+            <a:endParaRPr lang="en-US" sz="1050" dirty="0"/>
+          </a:p>
+        </p:txBody>
+      </p:sp>
       <p:sp>
         <p:nvSpPr>
           <p:cNvPr id="35" name="Text 32"/>
@@ -22165,7 +23303,7 @@
                           <a:ea typeface="Arial" pitchFamily="34" charset="-122"/>
                           <a:cs typeface="Arial" pitchFamily="34" charset="-120"/>
                         </a:rPr>
-                        <a:t>측정 4문항</a:t>
+                        <a:t>측정 4문항 — a경로(IV→MV) 조절</a:t>
                       </a:r>
                       <a:endParaRPr lang="en-US" sz="1150" dirty="0">
                         <a:latin typeface="Arial" charset="0"/>
@@ -22233,7 +23371,7 @@
                           <a:ea typeface="Arial" pitchFamily="34" charset="-122"/>
                           <a:cs typeface="Arial" pitchFamily="34" charset="-120"/>
                         </a:rPr>
-                        <a:t>재설계 검토 중</a:t>
+                        <a:t>문항 재설계 · 조작화 검토 중</a:t>
                       </a:r>
                       <a:endParaRPr lang="en-US" sz="1150" dirty="0">
                         <a:latin typeface="Arial" charset="0"/>
@@ -22840,7 +23978,7 @@
                           <a:ea typeface="Arial" pitchFamily="34" charset="-122"/>
                           <a:cs typeface="Arial" pitchFamily="34" charset="-120"/>
                         </a:rPr>
-                        <a:t>절차 상세는 Appendix C</a:t>
+                        <a:t>PROCESS Model 7 · 상세는 Appendix C</a:t>
                       </a:r>
                       <a:endParaRPr lang="en-US" sz="1150" dirty="0">
                         <a:latin typeface="Arial" charset="0"/>
@@ -23846,7 +24984,7 @@
                 <a:ea typeface="Arial" pitchFamily="34" charset="-122"/>
                 <a:cs typeface="Arial" pitchFamily="34" charset="-120"/>
               </a:rPr>
-              <a:t>조절변수의 위치</a:t>
+              <a:t>조절변수의 조작화</a:t>
             </a:r>
             <a:endParaRPr lang="en-US" sz="1350" dirty="0"/>
           </a:p>
@@ -23885,7 +25023,7 @@
                 <a:ea typeface="Arial" pitchFamily="34" charset="-122"/>
                 <a:cs typeface="Arial" pitchFamily="34" charset="-120"/>
               </a:rPr>
-              <a:t>측정으로 둘 것인가, 조작으로 바꿀 것인가.  사전 검정력 분석을 판정 기준으로 두고 있다</a:t>
+              <a:t>측정으로 둘 것인가, 시나리오에서 조작할 것인가.  사전 검정력 분석을 판정 기준으로 두고 있다</a:t>
             </a:r>
             <a:endParaRPr lang="en-US" sz="1200" dirty="0"/>
           </a:p>

--- a/Slides/deck/proposal-260826.pptx
+++ b/Slides/deck/proposal-260826.pptx
@@ -2329,7 +2329,7 @@
                 <a:ea typeface="Arial" pitchFamily="34" charset="-122"/>
                 <a:cs typeface="Arial" pitchFamily="34" charset="-120"/>
               </a:rPr>
-              <a:t>2026 윤제방 하계세미나  ·  연구 계획 발표</a:t>
+              <a:t>2026학년도 석사학위논문 프로포절 심사</a:t>
             </a:r>
             <a:endParaRPr lang="en-US" sz="1300" dirty="0"/>
           </a:p>
@@ -2891,7 +2891,7 @@
                 <a:ea typeface="Arial" pitchFamily="34" charset="-122"/>
                 <a:cs typeface="Arial" pitchFamily="34" charset="-120"/>
               </a:rPr>
-              <a:t>2026 윤제방 하계세미나</a:t>
+              <a:t>2026학년도 석사학위논문</a:t>
             </a:r>
             <a:endParaRPr lang="en-US" sz="1050" dirty="0"/>
           </a:p>
@@ -2930,7 +2930,7 @@
                 <a:ea typeface="Arial" pitchFamily="34" charset="-122"/>
                 <a:cs typeface="Arial" pitchFamily="34" charset="-120"/>
               </a:rPr>
-              <a:t>연구 계획 발표</a:t>
+              <a:t>프로포절 심사</a:t>
             </a:r>
             <a:endParaRPr lang="en-US" sz="1200" dirty="0"/>
           </a:p>
@@ -6271,7 +6271,7 @@
                 <a:ea typeface="Arial" pitchFamily="34" charset="-122"/>
                 <a:cs typeface="Arial" pitchFamily="34" charset="-120"/>
               </a:rPr>
-              <a:t>2026 윤제방 하계세미나</a:t>
+              <a:t>2026학년도 석사학위논문</a:t>
             </a:r>
             <a:endParaRPr lang="en-US" sz="1050" dirty="0"/>
           </a:p>
@@ -6310,7 +6310,7 @@
                 <a:ea typeface="Arial" pitchFamily="34" charset="-122"/>
                 <a:cs typeface="Arial" pitchFamily="34" charset="-120"/>
               </a:rPr>
-              <a:t>연구 계획 발표</a:t>
+              <a:t>프로포절 심사</a:t>
             </a:r>
             <a:endParaRPr lang="en-US" sz="1200" dirty="0"/>
           </a:p>
@@ -8149,7 +8149,7 @@
                 <a:ea typeface="Arial" pitchFamily="34" charset="-122"/>
                 <a:cs typeface="Arial" pitchFamily="34" charset="-120"/>
               </a:rPr>
-              <a:t>2026 윤제방 하계세미나</a:t>
+              <a:t>2026학년도 석사학위논문</a:t>
             </a:r>
             <a:endParaRPr lang="en-US" sz="1050" dirty="0"/>
           </a:p>
@@ -8188,7 +8188,7 @@
                 <a:ea typeface="Arial" pitchFamily="34" charset="-122"/>
                 <a:cs typeface="Arial" pitchFamily="34" charset="-120"/>
               </a:rPr>
-              <a:t>연구 계획 발표</a:t>
+              <a:t>프로포절 심사</a:t>
             </a:r>
             <a:endParaRPr lang="en-US" sz="1200" dirty="0"/>
           </a:p>
@@ -9366,7 +9366,7 @@
                 <a:ea typeface="Arial" pitchFamily="34" charset="-122"/>
                 <a:cs typeface="Arial" pitchFamily="34" charset="-120"/>
               </a:rPr>
-              <a:t>2026 윤제방 하계세미나</a:t>
+              <a:t>2026학년도 석사학위논문</a:t>
             </a:r>
             <a:endParaRPr lang="en-US" sz="1050" dirty="0"/>
           </a:p>
@@ -9405,7 +9405,7 @@
                 <a:ea typeface="Arial" pitchFamily="34" charset="-122"/>
                 <a:cs typeface="Arial" pitchFamily="34" charset="-120"/>
               </a:rPr>
-              <a:t>연구 계획 발표</a:t>
+              <a:t>프로포절 심사</a:t>
             </a:r>
             <a:endParaRPr lang="en-US" sz="1200" dirty="0"/>
           </a:p>
@@ -10089,7 +10089,7 @@
                 <a:ea typeface="Arial" pitchFamily="34" charset="-122"/>
                 <a:cs typeface="Arial" pitchFamily="34" charset="-120"/>
               </a:rPr>
-              <a:t>2026 윤제방 하계세미나</a:t>
+              <a:t>2026학년도 석사학위논문</a:t>
             </a:r>
             <a:endParaRPr lang="en-US" sz="1050" dirty="0"/>
           </a:p>
@@ -10128,7 +10128,7 @@
                 <a:ea typeface="Arial" pitchFamily="34" charset="-122"/>
                 <a:cs typeface="Arial" pitchFamily="34" charset="-120"/>
               </a:rPr>
-              <a:t>연구 계획 발표</a:t>
+              <a:t>프로포절 심사</a:t>
             </a:r>
             <a:endParaRPr lang="en-US" sz="1200" dirty="0"/>
           </a:p>
@@ -11670,7 +11670,7 @@
                 <a:ea typeface="Arial" pitchFamily="34" charset="-122"/>
                 <a:cs typeface="Arial" pitchFamily="34" charset="-120"/>
               </a:rPr>
-              <a:t>2026 윤제방 하계세미나</a:t>
+              <a:t>2026학년도 석사학위논문</a:t>
             </a:r>
             <a:endParaRPr lang="en-US" sz="1050" dirty="0"/>
           </a:p>
@@ -11709,7 +11709,7 @@
                 <a:ea typeface="Arial" pitchFamily="34" charset="-122"/>
                 <a:cs typeface="Arial" pitchFamily="34" charset="-120"/>
               </a:rPr>
-              <a:t>연구 계획 발표</a:t>
+              <a:t>프로포절 심사</a:t>
             </a:r>
             <a:endParaRPr lang="en-US" sz="1200" dirty="0"/>
           </a:p>
@@ -14491,7 +14491,7 @@
                 <a:ea typeface="Arial" pitchFamily="34" charset="-122"/>
                 <a:cs typeface="Arial" pitchFamily="34" charset="-120"/>
               </a:rPr>
-              <a:t>2026 윤제방 하계세미나</a:t>
+              <a:t>2026학년도 석사학위논문</a:t>
             </a:r>
             <a:endParaRPr lang="en-US" sz="1050" dirty="0"/>
           </a:p>
@@ -14530,7 +14530,7 @@
                 <a:ea typeface="Arial" pitchFamily="34" charset="-122"/>
                 <a:cs typeface="Arial" pitchFamily="34" charset="-120"/>
               </a:rPr>
-              <a:t>연구 계획 발표</a:t>
+              <a:t>프로포절 심사</a:t>
             </a:r>
             <a:endParaRPr lang="en-US" sz="1200" dirty="0"/>
           </a:p>
@@ -16035,7 +16035,7 @@
                 <a:ea typeface="Arial" pitchFamily="34" charset="-122"/>
                 <a:cs typeface="Arial" pitchFamily="34" charset="-120"/>
               </a:rPr>
-              <a:t>2026 윤제방 하계세미나</a:t>
+              <a:t>2026학년도 석사학위논문</a:t>
             </a:r>
             <a:endParaRPr lang="en-US" sz="1050" dirty="0"/>
           </a:p>
@@ -16074,7 +16074,7 @@
                 <a:ea typeface="Arial" pitchFamily="34" charset="-122"/>
                 <a:cs typeface="Arial" pitchFamily="34" charset="-120"/>
               </a:rPr>
-              <a:t>연구 계획 발표</a:t>
+              <a:t>프로포절 심사</a:t>
             </a:r>
             <a:endParaRPr lang="en-US" sz="1200" dirty="0"/>
           </a:p>
@@ -17049,7 +17049,7 @@
                 <a:ea typeface="Arial" pitchFamily="34" charset="-122"/>
                 <a:cs typeface="Arial" pitchFamily="34" charset="-120"/>
               </a:rPr>
-              <a:t>2026 윤제방 하계세미나</a:t>
+              <a:t>2026학년도 석사학위논문</a:t>
             </a:r>
             <a:endParaRPr lang="en-US" sz="1050" dirty="0"/>
           </a:p>
@@ -17088,7 +17088,7 @@
                 <a:ea typeface="Arial" pitchFamily="34" charset="-122"/>
                 <a:cs typeface="Arial" pitchFamily="34" charset="-120"/>
               </a:rPr>
-              <a:t>연구 계획 발표</a:t>
+              <a:t>프로포절 심사</a:t>
             </a:r>
             <a:endParaRPr lang="en-US" sz="1200" dirty="0"/>
           </a:p>
@@ -18053,7 +18053,7 @@
                 <a:ea typeface="Arial" pitchFamily="34" charset="-122"/>
                 <a:cs typeface="Arial" pitchFamily="34" charset="-120"/>
               </a:rPr>
-              <a:t>2026 윤제방 하계세미나</a:t>
+              <a:t>2026학년도 석사학위논문</a:t>
             </a:r>
             <a:endParaRPr lang="en-US" sz="1050" dirty="0"/>
           </a:p>
@@ -18092,7 +18092,7 @@
                 <a:ea typeface="Arial" pitchFamily="34" charset="-122"/>
                 <a:cs typeface="Arial" pitchFamily="34" charset="-120"/>
               </a:rPr>
-              <a:t>연구 계획 발표</a:t>
+              <a:t>프로포절 심사</a:t>
             </a:r>
             <a:endParaRPr lang="en-US" sz="1200" dirty="0"/>
           </a:p>
@@ -20376,7 +20376,7 @@
                 <a:ea typeface="Arial" pitchFamily="34" charset="-122"/>
                 <a:cs typeface="Arial" pitchFamily="34" charset="-120"/>
               </a:rPr>
-              <a:t>2026 윤제방 하계세미나</a:t>
+              <a:t>2026학년도 석사학위논문</a:t>
             </a:r>
             <a:endParaRPr lang="en-US" sz="1050" dirty="0"/>
           </a:p>
@@ -20415,7 +20415,7 @@
                 <a:ea typeface="Arial" pitchFamily="34" charset="-122"/>
                 <a:cs typeface="Arial" pitchFamily="34" charset="-120"/>
               </a:rPr>
-              <a:t>연구 계획 발표</a:t>
+              <a:t>프로포절 심사</a:t>
             </a:r>
             <a:endParaRPr lang="en-US" sz="1200" dirty="0"/>
           </a:p>
@@ -21221,7 +21221,7 @@
                 <a:ea typeface="Arial" pitchFamily="34" charset="-122"/>
                 <a:cs typeface="Arial" pitchFamily="34" charset="-120"/>
               </a:rPr>
-              <a:t>2026 윤제방 하계세미나</a:t>
+              <a:t>2026학년도 석사학위논문</a:t>
             </a:r>
             <a:endParaRPr lang="en-US" sz="1050" dirty="0"/>
           </a:p>
@@ -21260,7 +21260,7 @@
                 <a:ea typeface="Arial" pitchFamily="34" charset="-122"/>
                 <a:cs typeface="Arial" pitchFamily="34" charset="-120"/>
               </a:rPr>
-              <a:t>연구 계획 발표</a:t>
+              <a:t>프로포절 심사</a:t>
             </a:r>
             <a:endParaRPr lang="en-US" sz="1200" dirty="0"/>
           </a:p>
@@ -22766,7 +22766,7 @@
                 <a:ea typeface="Arial" pitchFamily="34" charset="-122"/>
                 <a:cs typeface="Arial" pitchFamily="34" charset="-120"/>
               </a:rPr>
-              <a:t>2026 윤제방 하계세미나</a:t>
+              <a:t>2026학년도 석사학위논문</a:t>
             </a:r>
             <a:endParaRPr lang="en-US" sz="1050" dirty="0"/>
           </a:p>
@@ -22805,7 +22805,7 @@
                 <a:ea typeface="Arial" pitchFamily="34" charset="-122"/>
                 <a:cs typeface="Arial" pitchFamily="34" charset="-120"/>
               </a:rPr>
-              <a:t>연구 계획 발표</a:t>
+              <a:t>프로포절 심사</a:t>
             </a:r>
             <a:endParaRPr lang="en-US" sz="1200" dirty="0"/>
           </a:p>
@@ -24894,7 +24894,7 @@
                 <a:ea typeface="Arial" pitchFamily="34" charset="-122"/>
                 <a:cs typeface="Arial" pitchFamily="34" charset="-120"/>
               </a:rPr>
-              <a:t>2026 윤제방 하계세미나</a:t>
+              <a:t>2026학년도 석사학위논문</a:t>
             </a:r>
             <a:endParaRPr lang="en-US" sz="1050" dirty="0"/>
           </a:p>
@@ -24933,7 +24933,7 @@
                 <a:ea typeface="Arial" pitchFamily="34" charset="-122"/>
                 <a:cs typeface="Arial" pitchFamily="34" charset="-120"/>
               </a:rPr>
-              <a:t>연구 계획 발표</a:t>
+              <a:t>프로포절 심사</a:t>
             </a:r>
             <a:endParaRPr lang="en-US" sz="1200" dirty="0"/>
           </a:p>
@@ -27107,7 +27107,7 @@
                 <a:ea typeface="Arial" pitchFamily="34" charset="-122"/>
                 <a:cs typeface="Arial" pitchFamily="34" charset="-120"/>
               </a:rPr>
-              <a:t>2026 윤제방 하계세미나</a:t>
+              <a:t>2026학년도 석사학위논문</a:t>
             </a:r>
             <a:endParaRPr lang="en-US" sz="1050" dirty="0"/>
           </a:p>
@@ -27146,7 +27146,7 @@
                 <a:ea typeface="Arial" pitchFamily="34" charset="-122"/>
                 <a:cs typeface="Arial" pitchFamily="34" charset="-120"/>
               </a:rPr>
-              <a:t>연구 계획 발표</a:t>
+              <a:t>프로포절 심사</a:t>
             </a:r>
             <a:endParaRPr lang="en-US" sz="1200" dirty="0"/>
           </a:p>
